--- a/06-hooks.pptx
+++ b/06-hooks.pptx
@@ -20759,8 +20759,8 @@
         </p:nvSpPr>
         <p:spPr>
           <a:xfrm>
-            <a:off x="457200" y="1554480"/>
-            <a:ext cx="11277295" cy="914400"/>
+            <a:off x="457200" y="1371600"/>
+            <a:ext cx="11277295" cy="640080"/>
           </a:xfrm>
           <a:prstGeom prst="roundRect">
             <a:avLst/>
@@ -20794,7 +20794,7 @@
           <a:p>
             <a:pPr algn="l"/>
             <a:r>
-              <a:rPr sz="1400">
+              <a:rPr sz="1300">
                 <a:solidFill>
                   <a:srgbClr val="2C2C2C"/>
                 </a:solidFill>
@@ -20813,7 +20813,7 @@
         </p:nvSpPr>
         <p:spPr>
           <a:xfrm>
-            <a:off x="457200" y="2651760"/>
+            <a:off x="457200" y="2103120"/>
             <a:ext cx="11277295" cy="365760"/>
           </a:xfrm>
           <a:prstGeom prst="rect">
@@ -20829,7 +20829,7 @@
           <a:p>
             <a:pPr algn="l"/>
             <a:r>
-              <a:rPr sz="1600" b="1" i="0">
+              <a:rPr sz="1500" b="1" i="0">
                 <a:solidFill>
                   <a:srgbClr val="DC2626"/>
                 </a:solidFill>
@@ -20848,8 +20848,8 @@
         </p:nvSpPr>
         <p:spPr>
           <a:xfrm>
-            <a:off x="457200" y="3017520"/>
-            <a:ext cx="10972800" cy="1645920"/>
+            <a:off x="457200" y="2468880"/>
+            <a:ext cx="10972800" cy="1097280"/>
           </a:xfrm>
           <a:prstGeom prst="rect">
             <a:avLst/>
@@ -20864,7 +20864,7 @@
           <a:p>
             <a:pPr algn="l"/>
             <a:r>
-              <a:rPr sz="1200">
+              <a:rPr sz="1100">
                 <a:solidFill>
                   <a:srgbClr val="2C2C2C"/>
                 </a:solidFill>
@@ -20876,7 +20876,7 @@
           <a:p>
             <a:pPr algn="l"/>
             <a:r>
-              <a:rPr sz="1200">
+              <a:rPr sz="1100">
                 <a:solidFill>
                   <a:srgbClr val="2C2C2C"/>
                 </a:solidFill>
@@ -20888,7 +20888,7 @@
           <a:p>
             <a:pPr algn="l"/>
             <a:r>
-              <a:rPr sz="1200">
+              <a:rPr sz="1100">
                 <a:solidFill>
                   <a:srgbClr val="2C2C2C"/>
                 </a:solidFill>
@@ -20907,7 +20907,7 @@
         </p:nvSpPr>
         <p:spPr>
           <a:xfrm>
-            <a:off x="457200" y="4846320"/>
+            <a:off x="457200" y="3657600"/>
             <a:ext cx="11277295" cy="365760"/>
           </a:xfrm>
           <a:prstGeom prst="rect">
@@ -20923,7 +20923,7 @@
           <a:p>
             <a:pPr algn="l"/>
             <a:r>
-              <a:rPr sz="1600" b="1" i="0">
+              <a:rPr sz="1500" b="1" i="0">
                 <a:solidFill>
                   <a:srgbClr val="16A34A"/>
                 </a:solidFill>
@@ -20942,8 +20942,8 @@
         </p:nvSpPr>
         <p:spPr>
           <a:xfrm>
-            <a:off x="457200" y="5212080"/>
-            <a:ext cx="5577840" cy="1188720"/>
+            <a:off x="457200" y="4023360"/>
+            <a:ext cx="5577840" cy="2194560"/>
           </a:xfrm>
           <a:prstGeom prst="roundRect">
             <a:avLst/>
@@ -20987,7 +20987,7 @@
         </p:nvSpPr>
         <p:spPr>
           <a:xfrm>
-            <a:off x="457200" y="5212080"/>
+            <a:off x="457200" y="4023360"/>
             <a:ext cx="5577840" cy="457200"/>
           </a:xfrm>
           <a:prstGeom prst="rect">
@@ -21030,7 +21030,7 @@
         </p:nvSpPr>
         <p:spPr>
           <a:xfrm>
-            <a:off x="457200" y="5212080"/>
+            <a:off x="457200" y="4023360"/>
             <a:ext cx="5577840" cy="457200"/>
           </a:xfrm>
           <a:prstGeom prst="rect">
@@ -21065,8 +21065,8 @@
         </p:nvSpPr>
         <p:spPr>
           <a:xfrm>
-            <a:off x="640080" y="5852160"/>
-            <a:ext cx="5212080" cy="457200"/>
+            <a:off x="640080" y="4663440"/>
+            <a:ext cx="5212080" cy="1463040"/>
           </a:xfrm>
           <a:prstGeom prst="rect">
             <a:avLst/>
@@ -21148,8 +21148,8 @@
         </p:nvSpPr>
         <p:spPr>
           <a:xfrm>
-            <a:off x="6156655" y="5212080"/>
-            <a:ext cx="5577840" cy="1188720"/>
+            <a:off x="6156655" y="4023360"/>
+            <a:ext cx="5577840" cy="2194560"/>
           </a:xfrm>
           <a:prstGeom prst="roundRect">
             <a:avLst/>
@@ -21193,7 +21193,7 @@
         </p:nvSpPr>
         <p:spPr>
           <a:xfrm>
-            <a:off x="6156655" y="5212080"/>
+            <a:off x="6156655" y="4023360"/>
             <a:ext cx="5577840" cy="457200"/>
           </a:xfrm>
           <a:prstGeom prst="rect">
@@ -21236,7 +21236,7 @@
         </p:nvSpPr>
         <p:spPr>
           <a:xfrm>
-            <a:off x="6156655" y="5212080"/>
+            <a:off x="6156655" y="4023360"/>
             <a:ext cx="5577840" cy="457200"/>
           </a:xfrm>
           <a:prstGeom prst="rect">
@@ -21271,8 +21271,8 @@
         </p:nvSpPr>
         <p:spPr>
           <a:xfrm>
-            <a:off x="6339535" y="5852160"/>
-            <a:ext cx="5212080" cy="457200"/>
+            <a:off x="6339535" y="4663440"/>
+            <a:ext cx="5212080" cy="1463040"/>
           </a:xfrm>
           <a:prstGeom prst="rect">
             <a:avLst/>
@@ -21586,7 +21586,7 @@
         </p:nvSpPr>
         <p:spPr>
           <a:xfrm>
-            <a:off x="457200" y="1554480"/>
+            <a:off x="457200" y="1325880"/>
             <a:ext cx="11277295" cy="365760"/>
           </a:xfrm>
           <a:prstGeom prst="rect">
@@ -21621,8 +21621,8 @@
         </p:nvSpPr>
         <p:spPr>
           <a:xfrm>
-            <a:off x="640080" y="2011680"/>
-            <a:ext cx="10972800" cy="2286000"/>
+            <a:off x="640080" y="1691640"/>
+            <a:ext cx="10972800" cy="1828800"/>
           </a:xfrm>
           <a:prstGeom prst="rect">
             <a:avLst/>
@@ -21637,7 +21637,7 @@
           <a:p>
             <a:pPr algn="l"/>
             <a:r>
-              <a:rPr sz="1200">
+              <a:rPr sz="1100">
                 <a:solidFill>
                   <a:srgbClr val="2C2C2C"/>
                 </a:solidFill>
@@ -21649,7 +21649,7 @@
           <a:p>
             <a:pPr algn="l"/>
             <a:r>
-              <a:rPr sz="1200">
+              <a:rPr sz="1100">
                 <a:solidFill>
                   <a:srgbClr val="2C2C2C"/>
                 </a:solidFill>
@@ -21661,7 +21661,7 @@
           <a:p>
             <a:pPr algn="l"/>
             <a:r>
-              <a:rPr sz="1200">
+              <a:rPr sz="1100">
                 <a:solidFill>
                   <a:srgbClr val="2C2C2C"/>
                 </a:solidFill>
@@ -21673,7 +21673,7 @@
           <a:p>
             <a:pPr algn="l"/>
             <a:r>
-              <a:rPr sz="1200">
+              <a:rPr sz="1100">
                 <a:solidFill>
                   <a:srgbClr val="2C2C2C"/>
                 </a:solidFill>
@@ -21685,7 +21685,7 @@
           <a:p>
             <a:pPr algn="l"/>
             <a:r>
-              <a:rPr sz="1200">
+              <a:rPr sz="1100">
                 <a:solidFill>
                   <a:srgbClr val="2C2C2C"/>
                 </a:solidFill>
@@ -21697,7 +21697,7 @@
           <a:p>
             <a:pPr algn="l"/>
             <a:r>
-              <a:rPr sz="1200">
+              <a:rPr sz="1100">
                 <a:solidFill>
                   <a:srgbClr val="2C2C2C"/>
                 </a:solidFill>
@@ -21716,8 +21716,8 @@
         </p:nvSpPr>
         <p:spPr>
           <a:xfrm>
-            <a:off x="457200" y="4480560"/>
-            <a:ext cx="11277295" cy="1097280"/>
+            <a:off x="457200" y="3657600"/>
+            <a:ext cx="11277295" cy="914400"/>
           </a:xfrm>
           <a:prstGeom prst="rect">
             <a:avLst/>
@@ -21759,8 +21759,8 @@
         </p:nvSpPr>
         <p:spPr>
           <a:xfrm>
-            <a:off x="457200" y="4480560"/>
-            <a:ext cx="11277295" cy="1097280"/>
+            <a:off x="457200" y="3657600"/>
+            <a:ext cx="11277295" cy="914400"/>
           </a:xfrm>
           <a:prstGeom prst="rect">
             <a:avLst/>
@@ -21775,7 +21775,7 @@
           <a:p>
             <a:pPr algn="l"/>
             <a:r>
-              <a:rPr sz="1200">
+              <a:rPr sz="1100">
                 <a:solidFill>
                   <a:srgbClr val="E6E6E6"/>
                 </a:solidFill>
@@ -21787,7 +21787,7 @@
           <a:p>
             <a:pPr algn="l"/>
             <a:r>
-              <a:rPr sz="1200">
+              <a:rPr sz="1100">
                 <a:solidFill>
                   <a:srgbClr val="E6E6E6"/>
                 </a:solidFill>
@@ -21799,7 +21799,7 @@
           <a:p>
             <a:pPr algn="l"/>
             <a:r>
-              <a:rPr sz="1200">
+              <a:rPr sz="1100">
                 <a:solidFill>
                   <a:srgbClr val="E6E6E6"/>
                 </a:solidFill>
@@ -21811,7 +21811,7 @@
           <a:p>
             <a:pPr algn="l"/>
             <a:r>
-              <a:rPr sz="1200">
+              <a:rPr sz="1100">
                 <a:solidFill>
                   <a:srgbClr val="E6E6E6"/>
                 </a:solidFill>
@@ -21823,7 +21823,7 @@
           <a:p>
             <a:pPr algn="l"/>
             <a:r>
-              <a:rPr sz="1200">
+              <a:rPr sz="1100">
                 <a:solidFill>
                   <a:srgbClr val="E6E6E6"/>
                 </a:solidFill>
@@ -21842,7 +21842,7 @@
         </p:nvSpPr>
         <p:spPr>
           <a:xfrm>
-            <a:off x="457200" y="5760720"/>
+            <a:off x="457200" y="4754880"/>
             <a:ext cx="11277295" cy="365760"/>
           </a:xfrm>
           <a:prstGeom prst="rect">
@@ -21877,7 +21877,7 @@
         </p:nvSpPr>
         <p:spPr>
           <a:xfrm>
-            <a:off x="457200" y="6126480"/>
+            <a:off x="457200" y="5120640"/>
             <a:ext cx="11277295" cy="822960"/>
           </a:xfrm>
           <a:prstGeom prst="rect">
@@ -25198,7 +25198,7 @@
         <p:spPr>
           <a:xfrm>
             <a:off x="457200" y="2011680"/>
-            <a:ext cx="6400800" cy="3657600"/>
+            <a:ext cx="6400800" cy="3200400"/>
           </a:xfrm>
           <a:prstGeom prst="rect">
             <a:avLst/>
@@ -25241,7 +25241,7 @@
         <p:spPr>
           <a:xfrm>
             <a:off x="457200" y="2011680"/>
-            <a:ext cx="6400800" cy="3657600"/>
+            <a:ext cx="6400800" cy="3200400"/>
           </a:xfrm>
           <a:prstGeom prst="rect">
             <a:avLst/>
@@ -25256,7 +25256,7 @@
           <a:p>
             <a:pPr algn="l"/>
             <a:r>
-              <a:rPr sz="1000">
+              <a:rPr sz="900">
                 <a:solidFill>
                   <a:srgbClr val="E6E6E6"/>
                 </a:solidFill>
@@ -25268,7 +25268,7 @@
           <a:p>
             <a:pPr algn="l"/>
             <a:r>
-              <a:rPr sz="1000">
+              <a:rPr sz="900">
                 <a:solidFill>
                   <a:srgbClr val="E6E6E6"/>
                 </a:solidFill>
@@ -25280,307 +25280,211 @@
           <a:p>
             <a:pPr algn="l"/>
             <a:r>
-              <a:rPr sz="1000">
+              <a:rPr sz="900">
                 <a:solidFill>
                   <a:srgbClr val="E6E6E6"/>
                 </a:solidFill>
                 <a:latin typeface="Consolas"/>
               </a:rPr>
-              <a:t> </a:t>
-            </a:r>
-          </a:p>
-          <a:p>
-            <a:pPr algn="l"/>
-            <a:r>
-              <a:rPr sz="1000">
+              <a:t>input=$(cat)</a:t>
+            </a:r>
+          </a:p>
+          <a:p>
+            <a:pPr algn="l"/>
+            <a:r>
+              <a:rPr sz="900">
                 <a:solidFill>
                   <a:srgbClr val="E6E6E6"/>
                 </a:solidFill>
                 <a:latin typeface="Consolas"/>
               </a:rPr>
-              <a:t>input=$(cat)</a:t>
-            </a:r>
-          </a:p>
-          <a:p>
-            <a:pPr algn="l"/>
-            <a:r>
-              <a:rPr sz="1000">
+              <a:t>FILE_PATH=$(echo "$input" | jq -r '.tool_input.file_path // empty')</a:t>
+            </a:r>
+          </a:p>
+          <a:p>
+            <a:pPr algn="l"/>
+            <a:r>
+              <a:rPr sz="900">
                 <a:solidFill>
                   <a:srgbClr val="E6E6E6"/>
                 </a:solidFill>
                 <a:latin typeface="Consolas"/>
               </a:rPr>
-              <a:t>FILE_PATH=$(echo "$input" | jq -r '.tool_input.file_path // empty')</a:t>
-            </a:r>
-          </a:p>
-          <a:p>
-            <a:pPr algn="l"/>
-            <a:r>
-              <a:rPr sz="1000">
+              <a:t>if [[ "$FILE_PATH" != *.ts &amp;&amp; "$FILE_PATH" != *.js ]]; then</a:t>
+            </a:r>
+          </a:p>
+          <a:p>
+            <a:pPr algn="l"/>
+            <a:r>
+              <a:rPr sz="900">
                 <a:solidFill>
                   <a:srgbClr val="E6E6E6"/>
                 </a:solidFill>
                 <a:latin typeface="Consolas"/>
               </a:rPr>
-              <a:t> </a:t>
-            </a:r>
-          </a:p>
-          <a:p>
-            <a:pPr algn="l"/>
-            <a:r>
-              <a:rPr sz="1000">
+              <a:t>  exit 0</a:t>
+            </a:r>
+          </a:p>
+          <a:p>
+            <a:pPr algn="l"/>
+            <a:r>
+              <a:rPr sz="900">
                 <a:solidFill>
                   <a:srgbClr val="E6E6E6"/>
                 </a:solidFill>
                 <a:latin typeface="Consolas"/>
               </a:rPr>
-              <a:t># 只對原始碼跑</a:t>
-            </a:r>
-          </a:p>
-          <a:p>
-            <a:pPr algn="l"/>
-            <a:r>
-              <a:rPr sz="1000">
+              <a:t>fi</a:t>
+            </a:r>
+          </a:p>
+          <a:p>
+            <a:pPr algn="l"/>
+            <a:r>
+              <a:rPr sz="900">
                 <a:solidFill>
                   <a:srgbClr val="E6E6E6"/>
                 </a:solidFill>
                 <a:latin typeface="Consolas"/>
               </a:rPr>
-              <a:t>if [[ "$FILE_PATH" != *.ts &amp;&amp; "$FILE_PATH" != *.js ]]; then</a:t>
-            </a:r>
-          </a:p>
-          <a:p>
-            <a:pPr algn="l"/>
-            <a:r>
-              <a:rPr sz="1000">
+              <a:t>RESULT=$(npm test 2&gt;&amp;1)</a:t>
+            </a:r>
+          </a:p>
+          <a:p>
+            <a:pPr algn="l"/>
+            <a:r>
+              <a:rPr sz="900">
                 <a:solidFill>
                   <a:srgbClr val="E6E6E6"/>
                 </a:solidFill>
                 <a:latin typeface="Consolas"/>
               </a:rPr>
-              <a:t>  exit 0</a:t>
-            </a:r>
-          </a:p>
-          <a:p>
-            <a:pPr algn="l"/>
-            <a:r>
-              <a:rPr sz="1000">
+              <a:t>EXIT_CODE=$?</a:t>
+            </a:r>
+          </a:p>
+          <a:p>
+            <a:pPr algn="l"/>
+            <a:r>
+              <a:rPr sz="900">
                 <a:solidFill>
                   <a:srgbClr val="E6E6E6"/>
                 </a:solidFill>
                 <a:latin typeface="Consolas"/>
               </a:rPr>
+              <a:t>if [ $EXIT_CODE -eq 0 ]; then</a:t>
+            </a:r>
+          </a:p>
+          <a:p>
+            <a:pPr algn="l"/>
+            <a:r>
+              <a:rPr sz="900">
+                <a:solidFill>
+                  <a:srgbClr val="E6E6E6"/>
+                </a:solidFill>
+                <a:latin typeface="Consolas"/>
+              </a:rPr>
+              <a:t>  MSG="Tests passed after $FILE_PATH"</a:t>
+            </a:r>
+          </a:p>
+          <a:p>
+            <a:pPr algn="l"/>
+            <a:r>
+              <a:rPr sz="900">
+                <a:solidFill>
+                  <a:srgbClr val="E6E6E6"/>
+                </a:solidFill>
+                <a:latin typeface="Consolas"/>
+              </a:rPr>
+              <a:t>else</a:t>
+            </a:r>
+          </a:p>
+          <a:p>
+            <a:pPr algn="l"/>
+            <a:r>
+              <a:rPr sz="900">
+                <a:solidFill>
+                  <a:srgbClr val="E6E6E6"/>
+                </a:solidFill>
+                <a:latin typeface="Consolas"/>
+              </a:rPr>
+              <a:t>  MSG="Tests failed: $RESULT"</a:t>
+            </a:r>
+          </a:p>
+          <a:p>
+            <a:pPr algn="l"/>
+            <a:r>
+              <a:rPr sz="900">
+                <a:solidFill>
+                  <a:srgbClr val="E6E6E6"/>
+                </a:solidFill>
+                <a:latin typeface="Consolas"/>
+              </a:rPr>
               <a:t>fi</a:t>
             </a:r>
           </a:p>
           <a:p>
             <a:pPr algn="l"/>
             <a:r>
-              <a:rPr sz="1000">
+              <a:rPr sz="900">
                 <a:solidFill>
                   <a:srgbClr val="E6E6E6"/>
                 </a:solidFill>
                 <a:latin typeface="Consolas"/>
               </a:rPr>
-              <a:t> </a:t>
-            </a:r>
-          </a:p>
-          <a:p>
-            <a:pPr algn="l"/>
-            <a:r>
-              <a:rPr sz="1000">
+              <a:t>jq -nc --arg msg "$MSG" '{</a:t>
+            </a:r>
+          </a:p>
+          <a:p>
+            <a:pPr algn="l"/>
+            <a:r>
+              <a:rPr sz="900">
                 <a:solidFill>
                   <a:srgbClr val="E6E6E6"/>
                 </a:solidFill>
                 <a:latin typeface="Consolas"/>
               </a:rPr>
-              <a:t># 跑測試</a:t>
-            </a:r>
-          </a:p>
-          <a:p>
-            <a:pPr algn="l"/>
-            <a:r>
-              <a:rPr sz="1000">
+              <a:t>  hookSpecificOutput: {</a:t>
+            </a:r>
+          </a:p>
+          <a:p>
+            <a:pPr algn="l"/>
+            <a:r>
+              <a:rPr sz="900">
                 <a:solidFill>
                   <a:srgbClr val="E6E6E6"/>
                 </a:solidFill>
                 <a:latin typeface="Consolas"/>
               </a:rPr>
-              <a:t>RESULT=$(npm test 2&gt;&amp;1)</a:t>
-            </a:r>
-          </a:p>
-          <a:p>
-            <a:pPr algn="l"/>
-            <a:r>
-              <a:rPr sz="1000">
+              <a:t>    hookEventName: "PostToolUse",</a:t>
+            </a:r>
+          </a:p>
+          <a:p>
+            <a:pPr algn="l"/>
+            <a:r>
+              <a:rPr sz="900">
                 <a:solidFill>
                   <a:srgbClr val="E6E6E6"/>
                 </a:solidFill>
                 <a:latin typeface="Consolas"/>
               </a:rPr>
-              <a:t>EXIT_CODE=$?</a:t>
-            </a:r>
-          </a:p>
-          <a:p>
-            <a:pPr algn="l"/>
-            <a:r>
-              <a:rPr sz="1000">
+              <a:t>    additionalContext: $msg</a:t>
+            </a:r>
+          </a:p>
+          <a:p>
+            <a:pPr algn="l"/>
+            <a:r>
+              <a:rPr sz="900">
                 <a:solidFill>
                   <a:srgbClr val="E6E6E6"/>
                 </a:solidFill>
                 <a:latin typeface="Consolas"/>
               </a:rPr>
-              <a:t> </a:t>
-            </a:r>
-          </a:p>
-          <a:p>
-            <a:pPr algn="l"/>
-            <a:r>
-              <a:rPr sz="1000">
-                <a:solidFill>
-                  <a:srgbClr val="E6E6E6"/>
-                </a:solidFill>
-                <a:latin typeface="Consolas"/>
-              </a:rPr>
-              <a:t>if [ $EXIT_CODE -eq 0 ]; then</a:t>
-            </a:r>
-          </a:p>
-          <a:p>
-            <a:pPr algn="l"/>
-            <a:r>
-              <a:rPr sz="1000">
-                <a:solidFill>
-                  <a:srgbClr val="E6E6E6"/>
-                </a:solidFill>
-                <a:latin typeface="Consolas"/>
-              </a:rPr>
-              <a:t>  MSG="Tests passed after editing $FILE_PATH"</a:t>
-            </a:r>
-          </a:p>
-          <a:p>
-            <a:pPr algn="l"/>
-            <a:r>
-              <a:rPr sz="1000">
-                <a:solidFill>
-                  <a:srgbClr val="E6E6E6"/>
-                </a:solidFill>
-                <a:latin typeface="Consolas"/>
-              </a:rPr>
-              <a:t>else</a:t>
-            </a:r>
-          </a:p>
-          <a:p>
-            <a:pPr algn="l"/>
-            <a:r>
-              <a:rPr sz="1000">
-                <a:solidFill>
-                  <a:srgbClr val="E6E6E6"/>
-                </a:solidFill>
-                <a:latin typeface="Consolas"/>
-              </a:rPr>
-              <a:t>  MSG="Tests failed after editing $FILE_PATH: $RESULT"</a:t>
-            </a:r>
-          </a:p>
-          <a:p>
-            <a:pPr algn="l"/>
-            <a:r>
-              <a:rPr sz="1000">
-                <a:solidFill>
-                  <a:srgbClr val="E6E6E6"/>
-                </a:solidFill>
-                <a:latin typeface="Consolas"/>
-              </a:rPr>
-              <a:t>fi</a:t>
-            </a:r>
-          </a:p>
-          <a:p>
-            <a:pPr algn="l"/>
-            <a:r>
-              <a:rPr sz="1000">
-                <a:solidFill>
-                  <a:srgbClr val="E6E6E6"/>
-                </a:solidFill>
-                <a:latin typeface="Consolas"/>
-              </a:rPr>
-              <a:t> </a:t>
-            </a:r>
-          </a:p>
-          <a:p>
-            <a:pPr algn="l"/>
-            <a:r>
-              <a:rPr sz="1000">
-                <a:solidFill>
-                  <a:srgbClr val="E6E6E6"/>
-                </a:solidFill>
-                <a:latin typeface="Consolas"/>
-              </a:rPr>
-              <a:t># 透過 additionalContext 把結果給 Claude</a:t>
-            </a:r>
-          </a:p>
-          <a:p>
-            <a:pPr algn="l"/>
-            <a:r>
-              <a:rPr sz="1000">
-                <a:solidFill>
-                  <a:srgbClr val="E6E6E6"/>
-                </a:solidFill>
-                <a:latin typeface="Consolas"/>
-              </a:rPr>
-              <a:t>jq -nc --arg msg "$MSG" '{</a:t>
-            </a:r>
-          </a:p>
-          <a:p>
-            <a:pPr algn="l"/>
-            <a:r>
-              <a:rPr sz="1000">
-                <a:solidFill>
-                  <a:srgbClr val="E6E6E6"/>
-                </a:solidFill>
-                <a:latin typeface="Consolas"/>
-              </a:rPr>
-              <a:t>  hookSpecificOutput: {</a:t>
-            </a:r>
-          </a:p>
-          <a:p>
-            <a:pPr algn="l"/>
-            <a:r>
-              <a:rPr sz="1000">
-                <a:solidFill>
-                  <a:srgbClr val="E6E6E6"/>
-                </a:solidFill>
-                <a:latin typeface="Consolas"/>
-              </a:rPr>
-              <a:t>    hookEventName: "PostToolUse",</a:t>
-            </a:r>
-          </a:p>
-          <a:p>
-            <a:pPr algn="l"/>
-            <a:r>
-              <a:rPr sz="1000">
-                <a:solidFill>
-                  <a:srgbClr val="E6E6E6"/>
-                </a:solidFill>
-                <a:latin typeface="Consolas"/>
-              </a:rPr>
-              <a:t>    additionalContext: $msg</a:t>
-            </a:r>
-          </a:p>
-          <a:p>
-            <a:pPr algn="l"/>
-            <a:r>
-              <a:rPr sz="1000">
-                <a:solidFill>
-                  <a:srgbClr val="E6E6E6"/>
-                </a:solidFill>
-                <a:latin typeface="Consolas"/>
-              </a:rPr>
               <a:t>  }</a:t>
             </a:r>
           </a:p>
           <a:p>
             <a:pPr algn="l"/>
             <a:r>
-              <a:rPr sz="1000">
+              <a:rPr sz="900">
                 <a:solidFill>
                   <a:srgbClr val="E6E6E6"/>
                 </a:solidFill>
@@ -25635,7 +25539,7 @@
         <p:spPr>
           <a:xfrm>
             <a:off x="7162495" y="2377440"/>
-            <a:ext cx="4572000" cy="3200400"/>
+            <a:ext cx="4572000" cy="3017520"/>
           </a:xfrm>
           <a:prstGeom prst="rect">
             <a:avLst/>
@@ -25678,7 +25582,7 @@
         <p:spPr>
           <a:xfrm>
             <a:off x="7162495" y="2377440"/>
-            <a:ext cx="4572000" cy="3200400"/>
+            <a:ext cx="4572000" cy="3017520"/>
           </a:xfrm>
           <a:prstGeom prst="rect">
             <a:avLst/>
@@ -25693,7 +25597,7 @@
           <a:p>
             <a:pPr algn="l"/>
             <a:r>
-              <a:rPr sz="1000">
+              <a:rPr sz="900">
                 <a:solidFill>
                   <a:srgbClr val="E6E6E6"/>
                 </a:solidFill>
@@ -25705,7 +25609,7 @@
           <a:p>
             <a:pPr algn="l"/>
             <a:r>
-              <a:rPr sz="1000">
+              <a:rPr sz="900">
                 <a:solidFill>
                   <a:srgbClr val="E6E6E6"/>
                 </a:solidFill>
@@ -25717,7 +25621,7 @@
           <a:p>
             <a:pPr algn="l"/>
             <a:r>
-              <a:rPr sz="1000">
+              <a:rPr sz="900">
                 <a:solidFill>
                   <a:srgbClr val="E6E6E6"/>
                 </a:solidFill>
@@ -25729,7 +25633,7 @@
           <a:p>
             <a:pPr algn="l"/>
             <a:r>
-              <a:rPr sz="1000">
+              <a:rPr sz="900">
                 <a:solidFill>
                   <a:srgbClr val="E6E6E6"/>
                 </a:solidFill>
@@ -25741,7 +25645,7 @@
           <a:p>
             <a:pPr algn="l"/>
             <a:r>
-              <a:rPr sz="1000">
+              <a:rPr sz="900">
                 <a:solidFill>
                   <a:srgbClr val="E6E6E6"/>
                 </a:solidFill>
@@ -25753,7 +25657,7 @@
           <a:p>
             <a:pPr algn="l"/>
             <a:r>
-              <a:rPr sz="1000">
+              <a:rPr sz="900">
                 <a:solidFill>
                   <a:srgbClr val="E6E6E6"/>
                 </a:solidFill>
@@ -25765,7 +25669,7 @@
           <a:p>
             <a:pPr algn="l"/>
             <a:r>
-              <a:rPr sz="1000">
+              <a:rPr sz="900">
                 <a:solidFill>
                   <a:srgbClr val="E6E6E6"/>
                 </a:solidFill>
@@ -25777,7 +25681,7 @@
           <a:p>
             <a:pPr algn="l"/>
             <a:r>
-              <a:rPr sz="1000">
+              <a:rPr sz="900">
                 <a:solidFill>
                   <a:srgbClr val="E6E6E6"/>
                 </a:solidFill>
@@ -25789,7 +25693,7 @@
           <a:p>
             <a:pPr algn="l"/>
             <a:r>
-              <a:rPr sz="1000">
+              <a:rPr sz="900">
                 <a:solidFill>
                   <a:srgbClr val="E6E6E6"/>
                 </a:solidFill>
@@ -25801,7 +25705,7 @@
           <a:p>
             <a:pPr algn="l"/>
             <a:r>
-              <a:rPr sz="1000">
+              <a:rPr sz="900">
                 <a:solidFill>
                   <a:srgbClr val="E6E6E6"/>
                 </a:solidFill>
@@ -25813,7 +25717,7 @@
           <a:p>
             <a:pPr algn="l"/>
             <a:r>
-              <a:rPr sz="1000">
+              <a:rPr sz="900">
                 <a:solidFill>
                   <a:srgbClr val="E6E6E6"/>
                 </a:solidFill>
@@ -25825,7 +25729,7 @@
           <a:p>
             <a:pPr algn="l"/>
             <a:r>
-              <a:rPr sz="1000">
+              <a:rPr sz="900">
                 <a:solidFill>
                   <a:srgbClr val="E6E6E6"/>
                 </a:solidFill>
@@ -25837,7 +25741,7 @@
           <a:p>
             <a:pPr algn="l"/>
             <a:r>
-              <a:rPr sz="1000">
+              <a:rPr sz="900">
                 <a:solidFill>
                   <a:srgbClr val="E6E6E6"/>
                 </a:solidFill>
@@ -25849,7 +25753,7 @@
           <a:p>
             <a:pPr algn="l"/>
             <a:r>
-              <a:rPr sz="1000">
+              <a:rPr sz="900">
                 <a:solidFill>
                   <a:srgbClr val="E6E6E6"/>
                 </a:solidFill>
@@ -25861,7 +25765,7 @@
           <a:p>
             <a:pPr algn="l"/>
             <a:r>
-              <a:rPr sz="1000">
+              <a:rPr sz="900">
                 <a:solidFill>
                   <a:srgbClr val="E6E6E6"/>
                 </a:solidFill>
@@ -25873,7 +25777,7 @@
           <a:p>
             <a:pPr algn="l"/>
             <a:r>
-              <a:rPr sz="1000">
+              <a:rPr sz="900">
                 <a:solidFill>
                   <a:srgbClr val="E6E6E6"/>
                 </a:solidFill>
@@ -25885,7 +25789,7 @@
           <a:p>
             <a:pPr algn="l"/>
             <a:r>
-              <a:rPr sz="1000">
+              <a:rPr sz="900">
                 <a:solidFill>
                   <a:srgbClr val="E6E6E6"/>
                 </a:solidFill>
@@ -25897,7 +25801,7 @@
           <a:p>
             <a:pPr algn="l"/>
             <a:r>
-              <a:rPr sz="1000">
+              <a:rPr sz="900">
                 <a:solidFill>
                   <a:srgbClr val="E6E6E6"/>
                 </a:solidFill>
@@ -25909,7 +25813,7 @@
           <a:p>
             <a:pPr algn="l"/>
             <a:r>
-              <a:rPr sz="1000">
+              <a:rPr sz="900">
                 <a:solidFill>
                   <a:srgbClr val="E6E6E6"/>
                 </a:solidFill>
@@ -25921,7 +25825,7 @@
           <a:p>
             <a:pPr algn="l"/>
             <a:r>
-              <a:rPr sz="1000">
+              <a:rPr sz="900">
                 <a:solidFill>
                   <a:srgbClr val="E6E6E6"/>
                 </a:solidFill>
@@ -25933,7 +25837,7 @@
           <a:p>
             <a:pPr algn="l"/>
             <a:r>
-              <a:rPr sz="1000">
+              <a:rPr sz="900">
                 <a:solidFill>
                   <a:srgbClr val="E6E6E6"/>
                 </a:solidFill>

--- a/06-hooks.pptx
+++ b/06-hooks.pptx
@@ -5965,8 +5965,8 @@
         </p:nvSpPr>
         <p:spPr>
           <a:xfrm>
-            <a:off x="457200" y="1554480"/>
-            <a:ext cx="6400800" cy="2743200"/>
+            <a:off x="457200" y="1371600"/>
+            <a:ext cx="6400800" cy="3108960"/>
           </a:xfrm>
           <a:prstGeom prst="rect">
             <a:avLst/>
@@ -6008,8 +6008,8 @@
         </p:nvSpPr>
         <p:spPr>
           <a:xfrm>
-            <a:off x="457200" y="1554480"/>
-            <a:ext cx="6400800" cy="2743200"/>
+            <a:off x="457200" y="1371600"/>
+            <a:ext cx="6400800" cy="3108960"/>
           </a:xfrm>
           <a:prstGeom prst="rect">
             <a:avLst/>
@@ -6024,7 +6024,7 @@
           <a:p>
             <a:pPr algn="l"/>
             <a:r>
-              <a:rPr sz="1200">
+              <a:rPr sz="1100">
                 <a:solidFill>
                   <a:srgbClr val="E6E6E6"/>
                 </a:solidFill>
@@ -6036,7 +6036,7 @@
           <a:p>
             <a:pPr algn="l"/>
             <a:r>
-              <a:rPr sz="1200">
+              <a:rPr sz="1100">
                 <a:solidFill>
                   <a:srgbClr val="E6E6E6"/>
                 </a:solidFill>
@@ -6048,7 +6048,7 @@
           <a:p>
             <a:pPr algn="l"/>
             <a:r>
-              <a:rPr sz="1200">
+              <a:rPr sz="1100">
                 <a:solidFill>
                   <a:srgbClr val="E6E6E6"/>
                 </a:solidFill>
@@ -6060,7 +6060,7 @@
           <a:p>
             <a:pPr algn="l"/>
             <a:r>
-              <a:rPr sz="1200">
+              <a:rPr sz="1100">
                 <a:solidFill>
                   <a:srgbClr val="E6E6E6"/>
                 </a:solidFill>
@@ -6072,7 +6072,7 @@
           <a:p>
             <a:pPr algn="l"/>
             <a:r>
-              <a:rPr sz="1200">
+              <a:rPr sz="1100">
                 <a:solidFill>
                   <a:srgbClr val="E6E6E6"/>
                 </a:solidFill>
@@ -6084,7 +6084,7 @@
           <a:p>
             <a:pPr algn="l"/>
             <a:r>
-              <a:rPr sz="1200">
+              <a:rPr sz="1100">
                 <a:solidFill>
                   <a:srgbClr val="E6E6E6"/>
                 </a:solidFill>
@@ -6096,7 +6096,7 @@
           <a:p>
             <a:pPr algn="l"/>
             <a:r>
-              <a:rPr sz="1200">
+              <a:rPr sz="1100">
                 <a:solidFill>
                   <a:srgbClr val="E6E6E6"/>
                 </a:solidFill>
@@ -6108,7 +6108,7 @@
           <a:p>
             <a:pPr algn="l"/>
             <a:r>
-              <a:rPr sz="1200">
+              <a:rPr sz="1100">
                 <a:solidFill>
                   <a:srgbClr val="E6E6E6"/>
                 </a:solidFill>
@@ -6120,7 +6120,7 @@
           <a:p>
             <a:pPr algn="l"/>
             <a:r>
-              <a:rPr sz="1200">
+              <a:rPr sz="1100">
                 <a:solidFill>
                   <a:srgbClr val="E6E6E6"/>
                 </a:solidFill>
@@ -6132,7 +6132,7 @@
           <a:p>
             <a:pPr algn="l"/>
             <a:r>
-              <a:rPr sz="1200">
+              <a:rPr sz="1100">
                 <a:solidFill>
                   <a:srgbClr val="E6E6E6"/>
                 </a:solidFill>
@@ -6144,7 +6144,7 @@
           <a:p>
             <a:pPr algn="l"/>
             <a:r>
-              <a:rPr sz="1200">
+              <a:rPr sz="1100">
                 <a:solidFill>
                   <a:srgbClr val="E6E6E6"/>
                 </a:solidFill>
@@ -6156,7 +6156,7 @@
           <a:p>
             <a:pPr algn="l"/>
             <a:r>
-              <a:rPr sz="1200">
+              <a:rPr sz="1100">
                 <a:solidFill>
                   <a:srgbClr val="E6E6E6"/>
                 </a:solidFill>
@@ -6168,7 +6168,7 @@
           <a:p>
             <a:pPr algn="l"/>
             <a:r>
-              <a:rPr sz="1200">
+              <a:rPr sz="1100">
                 <a:solidFill>
                   <a:srgbClr val="E6E6E6"/>
                 </a:solidFill>
@@ -6180,7 +6180,7 @@
           <a:p>
             <a:pPr algn="l"/>
             <a:r>
-              <a:rPr sz="1200">
+              <a:rPr sz="1100">
                 <a:solidFill>
                   <a:srgbClr val="E6E6E6"/>
                 </a:solidFill>
@@ -6192,7 +6192,7 @@
           <a:p>
             <a:pPr algn="l"/>
             <a:r>
-              <a:rPr sz="1200">
+              <a:rPr sz="1100">
                 <a:solidFill>
                   <a:srgbClr val="E6E6E6"/>
                 </a:solidFill>
@@ -6204,7 +6204,7 @@
           <a:p>
             <a:pPr algn="l"/>
             <a:r>
-              <a:rPr sz="1200">
+              <a:rPr sz="1100">
                 <a:solidFill>
                   <a:srgbClr val="E6E6E6"/>
                 </a:solidFill>
@@ -6216,7 +6216,7 @@
           <a:p>
             <a:pPr algn="l"/>
             <a:r>
-              <a:rPr sz="1200">
+              <a:rPr sz="1100">
                 <a:solidFill>
                   <a:srgbClr val="E6E6E6"/>
                 </a:solidFill>
@@ -6228,7 +6228,7 @@
           <a:p>
             <a:pPr algn="l"/>
             <a:r>
-              <a:rPr sz="1200">
+              <a:rPr sz="1100">
                 <a:solidFill>
                   <a:srgbClr val="E6E6E6"/>
                 </a:solidFill>
@@ -6247,7 +6247,7 @@
         </p:nvSpPr>
         <p:spPr>
           <a:xfrm>
-            <a:off x="7162495" y="1554480"/>
+            <a:off x="7162495" y="1371600"/>
             <a:ext cx="4572000" cy="365760"/>
           </a:xfrm>
           <a:prstGeom prst="rect">
@@ -6282,8 +6282,8 @@
         </p:nvSpPr>
         <p:spPr>
           <a:xfrm>
-            <a:off x="7162495" y="1920240"/>
-            <a:ext cx="4572000" cy="2377440"/>
+            <a:off x="7162495" y="1737360"/>
+            <a:ext cx="4572000" cy="2651760"/>
           </a:xfrm>
           <a:prstGeom prst="rect">
             <a:avLst/>
@@ -6325,8 +6325,8 @@
         </p:nvSpPr>
         <p:spPr>
           <a:xfrm>
-            <a:off x="7162495" y="1920240"/>
-            <a:ext cx="4572000" cy="2377440"/>
+            <a:off x="7162495" y="1737360"/>
+            <a:ext cx="4572000" cy="2651760"/>
           </a:xfrm>
           <a:prstGeom prst="rect">
             <a:avLst/>
@@ -6492,7 +6492,7 @@
         </p:nvSpPr>
         <p:spPr>
           <a:xfrm>
-            <a:off x="457200" y="4480560"/>
+            <a:off x="457200" y="4572000"/>
             <a:ext cx="11277295" cy="365760"/>
           </a:xfrm>
           <a:prstGeom prst="rect">
@@ -6527,7 +6527,7 @@
         </p:nvSpPr>
         <p:spPr>
           <a:xfrm>
-            <a:off x="457200" y="5029200"/>
+            <a:off x="457200" y="4937760"/>
             <a:ext cx="11277295" cy="365760"/>
           </a:xfrm>
           <a:prstGeom prst="rect">
@@ -6562,8 +6562,8 @@
         </p:nvSpPr>
         <p:spPr>
           <a:xfrm>
-            <a:off x="457200" y="5577840"/>
-            <a:ext cx="11277295" cy="365760"/>
+            <a:off x="457200" y="5394960"/>
+            <a:ext cx="11277295" cy="457200"/>
           </a:xfrm>
           <a:prstGeom prst="roundRect">
             <a:avLst/>
@@ -9161,7 +9161,7 @@
           <p:nvPr/>
         </p:nvGraphicFramePr>
         <p:xfrm>
-          <a:off x="457200" y="1554480"/>
+          <a:off x="457200" y="1371600"/>
           <a:ext cx="11277295" cy="1828800"/>
         </p:xfrm>
         <a:graphic>
@@ -9471,8 +9471,8 @@
         </p:nvSpPr>
         <p:spPr>
           <a:xfrm>
-            <a:off x="457200" y="3657600"/>
-            <a:ext cx="11277295" cy="1828800"/>
+            <a:off x="457200" y="3383280"/>
+            <a:ext cx="11277295" cy="2286000"/>
           </a:xfrm>
           <a:prstGeom prst="rect">
             <a:avLst/>
@@ -9514,8 +9514,8 @@
         </p:nvSpPr>
         <p:spPr>
           <a:xfrm>
-            <a:off x="457200" y="3657600"/>
-            <a:ext cx="11277295" cy="1828800"/>
+            <a:off x="457200" y="3383280"/>
+            <a:ext cx="11277295" cy="2286000"/>
           </a:xfrm>
           <a:prstGeom prst="rect">
             <a:avLst/>
@@ -9530,7 +9530,7 @@
           <a:p>
             <a:pPr algn="l"/>
             <a:r>
-              <a:rPr sz="1100">
+              <a:rPr sz="1000">
                 <a:solidFill>
                   <a:srgbClr val="E6E6E6"/>
                 </a:solidFill>
@@ -9542,7 +9542,7 @@
           <a:p>
             <a:pPr algn="l"/>
             <a:r>
-              <a:rPr sz="1100">
+              <a:rPr sz="1000">
                 <a:solidFill>
                   <a:srgbClr val="E6E6E6"/>
                 </a:solidFill>
@@ -9554,7 +9554,7 @@
           <a:p>
             <a:pPr algn="l"/>
             <a:r>
-              <a:rPr sz="1100">
+              <a:rPr sz="1000">
                 <a:solidFill>
                   <a:srgbClr val="E6E6E6"/>
                 </a:solidFill>
@@ -9566,7 +9566,7 @@
           <a:p>
             <a:pPr algn="l"/>
             <a:r>
-              <a:rPr sz="1100">
+              <a:rPr sz="1000">
                 <a:solidFill>
                   <a:srgbClr val="E6E6E6"/>
                 </a:solidFill>
@@ -9578,7 +9578,7 @@
           <a:p>
             <a:pPr algn="l"/>
             <a:r>
-              <a:rPr sz="1100">
+              <a:rPr sz="1000">
                 <a:solidFill>
                   <a:srgbClr val="E6E6E6"/>
                 </a:solidFill>
@@ -9590,7 +9590,7 @@
           <a:p>
             <a:pPr algn="l"/>
             <a:r>
-              <a:rPr sz="1100">
+              <a:rPr sz="1000">
                 <a:solidFill>
                   <a:srgbClr val="E6E6E6"/>
                 </a:solidFill>
@@ -9602,7 +9602,7 @@
           <a:p>
             <a:pPr algn="l"/>
             <a:r>
-              <a:rPr sz="1100">
+              <a:rPr sz="1000">
                 <a:solidFill>
                   <a:srgbClr val="E6E6E6"/>
                 </a:solidFill>
@@ -9614,7 +9614,7 @@
           <a:p>
             <a:pPr algn="l"/>
             <a:r>
-              <a:rPr sz="1100">
+              <a:rPr sz="1000">
                 <a:solidFill>
                   <a:srgbClr val="E6E6E6"/>
                 </a:solidFill>
@@ -9626,7 +9626,7 @@
           <a:p>
             <a:pPr algn="l"/>
             <a:r>
-              <a:rPr sz="1100">
+              <a:rPr sz="1000">
                 <a:solidFill>
                   <a:srgbClr val="E6E6E6"/>
                 </a:solidFill>
@@ -9638,7 +9638,7 @@
           <a:p>
             <a:pPr algn="l"/>
             <a:r>
-              <a:rPr sz="1100">
+              <a:rPr sz="1000">
                 <a:solidFill>
                   <a:srgbClr val="E6E6E6"/>
                 </a:solidFill>
@@ -9650,7 +9650,7 @@
           <a:p>
             <a:pPr algn="l"/>
             <a:r>
-              <a:rPr sz="1100">
+              <a:rPr sz="1000">
                 <a:solidFill>
                   <a:srgbClr val="E6E6E6"/>
                 </a:solidFill>
@@ -9669,7 +9669,7 @@
         </p:nvSpPr>
         <p:spPr>
           <a:xfrm>
-            <a:off x="457200" y="5669280"/>
+            <a:off x="457200" y="5760720"/>
             <a:ext cx="11277295" cy="365760"/>
           </a:xfrm>
           <a:prstGeom prst="roundRect">
@@ -9723,7 +9723,7 @@
         </p:nvSpPr>
         <p:spPr>
           <a:xfrm>
-            <a:off x="457200" y="6126480"/>
+            <a:off x="457200" y="6217920"/>
             <a:ext cx="11277295" cy="365760"/>
           </a:xfrm>
           <a:prstGeom prst="rect">
@@ -10002,7 +10002,7 @@
         </p:nvSpPr>
         <p:spPr>
           <a:xfrm>
-            <a:off x="457200" y="1554480"/>
+            <a:off x="457200" y="1371600"/>
             <a:ext cx="11277295" cy="365760"/>
           </a:xfrm>
           <a:prstGeom prst="rect">
@@ -10018,7 +10018,7 @@
           <a:p>
             <a:pPr algn="ctr"/>
             <a:r>
-              <a:rPr sz="1800" b="1" i="0">
+              <a:rPr sz="1700" b="1" i="0">
                 <a:solidFill>
                   <a:srgbClr val="C75A1A"/>
                 </a:solidFill>
@@ -10037,8 +10037,8 @@
         </p:nvSpPr>
         <p:spPr>
           <a:xfrm>
-            <a:off x="457200" y="2103120"/>
-            <a:ext cx="11277295" cy="2286000"/>
+            <a:off x="457200" y="1828800"/>
+            <a:ext cx="11277295" cy="2560320"/>
           </a:xfrm>
           <a:prstGeom prst="rect">
             <a:avLst/>
@@ -10080,8 +10080,8 @@
         </p:nvSpPr>
         <p:spPr>
           <a:xfrm>
-            <a:off x="457200" y="2103120"/>
-            <a:ext cx="11277295" cy="2286000"/>
+            <a:off x="457200" y="1828800"/>
+            <a:ext cx="11277295" cy="2560320"/>
           </a:xfrm>
           <a:prstGeom prst="rect">
             <a:avLst/>
@@ -10096,7 +10096,7 @@
           <a:p>
             <a:pPr algn="l"/>
             <a:r>
-              <a:rPr sz="1100">
+              <a:rPr sz="1000">
                 <a:solidFill>
                   <a:srgbClr val="E6E6E6"/>
                 </a:solidFill>
@@ -10108,7 +10108,7 @@
           <a:p>
             <a:pPr algn="l"/>
             <a:r>
-              <a:rPr sz="1100">
+              <a:rPr sz="1000">
                 <a:solidFill>
                   <a:srgbClr val="E6E6E6"/>
                 </a:solidFill>
@@ -10120,7 +10120,7 @@
           <a:p>
             <a:pPr algn="l"/>
             <a:r>
-              <a:rPr sz="1100">
+              <a:rPr sz="1000">
                 <a:solidFill>
                   <a:srgbClr val="E6E6E6"/>
                 </a:solidFill>
@@ -10132,7 +10132,7 @@
           <a:p>
             <a:pPr algn="l"/>
             <a:r>
-              <a:rPr sz="1100">
+              <a:rPr sz="1000">
                 <a:solidFill>
                   <a:srgbClr val="E6E6E6"/>
                 </a:solidFill>
@@ -10144,7 +10144,7 @@
           <a:p>
             <a:pPr algn="l"/>
             <a:r>
-              <a:rPr sz="1100">
+              <a:rPr sz="1000">
                 <a:solidFill>
                   <a:srgbClr val="E6E6E6"/>
                 </a:solidFill>
@@ -10156,7 +10156,7 @@
           <a:p>
             <a:pPr algn="l"/>
             <a:r>
-              <a:rPr sz="1100">
+              <a:rPr sz="1000">
                 <a:solidFill>
                   <a:srgbClr val="E6E6E6"/>
                 </a:solidFill>
@@ -10168,7 +10168,7 @@
           <a:p>
             <a:pPr algn="l"/>
             <a:r>
-              <a:rPr sz="1100">
+              <a:rPr sz="1000">
                 <a:solidFill>
                   <a:srgbClr val="E6E6E6"/>
                 </a:solidFill>
@@ -10180,7 +10180,7 @@
           <a:p>
             <a:pPr algn="l"/>
             <a:r>
-              <a:rPr sz="1100">
+              <a:rPr sz="1000">
                 <a:solidFill>
                   <a:srgbClr val="E6E6E6"/>
                 </a:solidFill>
@@ -10192,7 +10192,7 @@
           <a:p>
             <a:pPr algn="l"/>
             <a:r>
-              <a:rPr sz="1100">
+              <a:rPr sz="1000">
                 <a:solidFill>
                   <a:srgbClr val="E6E6E6"/>
                 </a:solidFill>
@@ -10204,7 +10204,7 @@
           <a:p>
             <a:pPr algn="l"/>
             <a:r>
-              <a:rPr sz="1100">
+              <a:rPr sz="1000">
                 <a:solidFill>
                   <a:srgbClr val="E6E6E6"/>
                 </a:solidFill>
@@ -10216,7 +10216,7 @@
           <a:p>
             <a:pPr algn="l"/>
             <a:r>
-              <a:rPr sz="1100">
+              <a:rPr sz="1000">
                 <a:solidFill>
                   <a:srgbClr val="E6E6E6"/>
                 </a:solidFill>
@@ -10228,7 +10228,7 @@
           <a:p>
             <a:pPr algn="l"/>
             <a:r>
-              <a:rPr sz="1100">
+              <a:rPr sz="1000">
                 <a:solidFill>
                   <a:srgbClr val="E6E6E6"/>
                 </a:solidFill>
@@ -10240,7 +10240,7 @@
           <a:p>
             <a:pPr algn="l"/>
             <a:r>
-              <a:rPr sz="1100">
+              <a:rPr sz="1000">
                 <a:solidFill>
                   <a:srgbClr val="E6E6E6"/>
                 </a:solidFill>
@@ -10252,7 +10252,7 @@
           <a:p>
             <a:pPr algn="l"/>
             <a:r>
-              <a:rPr sz="1100">
+              <a:rPr sz="1000">
                 <a:solidFill>
                   <a:srgbClr val="E6E6E6"/>
                 </a:solidFill>
@@ -10271,7 +10271,7 @@
         </p:nvSpPr>
         <p:spPr>
           <a:xfrm>
-            <a:off x="457200" y="4572000"/>
+            <a:off x="457200" y="4526280"/>
             <a:ext cx="11277295" cy="365760"/>
           </a:xfrm>
           <a:prstGeom prst="rect">
@@ -10306,8 +10306,8 @@
         </p:nvSpPr>
         <p:spPr>
           <a:xfrm>
-            <a:off x="457200" y="4937760"/>
-            <a:ext cx="5577840" cy="1463040"/>
+            <a:off x="457200" y="4892040"/>
+            <a:ext cx="5577840" cy="1554480"/>
           </a:xfrm>
           <a:prstGeom prst="roundRect">
             <a:avLst/>
@@ -10351,7 +10351,7 @@
         </p:nvSpPr>
         <p:spPr>
           <a:xfrm>
-            <a:off x="457200" y="4937760"/>
+            <a:off x="457200" y="4892040"/>
             <a:ext cx="5577840" cy="457200"/>
           </a:xfrm>
           <a:prstGeom prst="rect">
@@ -10394,7 +10394,7 @@
         </p:nvSpPr>
         <p:spPr>
           <a:xfrm>
-            <a:off x="457200" y="4937760"/>
+            <a:off x="457200" y="4892040"/>
             <a:ext cx="5577840" cy="457200"/>
           </a:xfrm>
           <a:prstGeom prst="rect">
@@ -10429,8 +10429,8 @@
         </p:nvSpPr>
         <p:spPr>
           <a:xfrm>
-            <a:off x="640080" y="5577840"/>
-            <a:ext cx="5212080" cy="731520"/>
+            <a:off x="640080" y="5532120"/>
+            <a:ext cx="5212080" cy="822960"/>
           </a:xfrm>
           <a:prstGeom prst="rect">
             <a:avLst/>
@@ -10500,8 +10500,8 @@
         </p:nvSpPr>
         <p:spPr>
           <a:xfrm>
-            <a:off x="6156655" y="4937760"/>
-            <a:ext cx="5577840" cy="1463040"/>
+            <a:off x="6156655" y="4892040"/>
+            <a:ext cx="5577840" cy="1554480"/>
           </a:xfrm>
           <a:prstGeom prst="roundRect">
             <a:avLst/>
@@ -10545,7 +10545,7 @@
         </p:nvSpPr>
         <p:spPr>
           <a:xfrm>
-            <a:off x="6156655" y="4937760"/>
+            <a:off x="6156655" y="4892040"/>
             <a:ext cx="5577840" cy="457200"/>
           </a:xfrm>
           <a:prstGeom prst="rect">
@@ -10588,7 +10588,7 @@
         </p:nvSpPr>
         <p:spPr>
           <a:xfrm>
-            <a:off x="6156655" y="4937760"/>
+            <a:off x="6156655" y="4892040"/>
             <a:ext cx="5577840" cy="457200"/>
           </a:xfrm>
           <a:prstGeom prst="rect">
@@ -10623,8 +10623,8 @@
         </p:nvSpPr>
         <p:spPr>
           <a:xfrm>
-            <a:off x="6339535" y="5577840"/>
-            <a:ext cx="5212080" cy="731520"/>
+            <a:off x="6339535" y="5532120"/>
+            <a:ext cx="5212080" cy="822960"/>
           </a:xfrm>
           <a:prstGeom prst="rect">
             <a:avLst/>
@@ -10938,7 +10938,7 @@
         </p:nvSpPr>
         <p:spPr>
           <a:xfrm>
-            <a:off x="457200" y="1554480"/>
+            <a:off x="457200" y="1325880"/>
             <a:ext cx="11277295" cy="365760"/>
           </a:xfrm>
           <a:prstGeom prst="rect">
@@ -10954,7 +10954,7 @@
           <a:p>
             <a:pPr algn="ctr"/>
             <a:r>
-              <a:rPr sz="1800" b="1" i="0">
+              <a:rPr sz="1700" b="1" i="0">
                 <a:solidFill>
                   <a:srgbClr val="DC2626"/>
                 </a:solidFill>
@@ -10973,8 +10973,8 @@
         </p:nvSpPr>
         <p:spPr>
           <a:xfrm>
-            <a:off x="700887" y="2103120"/>
-            <a:ext cx="2560320" cy="1828800"/>
+            <a:off x="700887" y="1828800"/>
+            <a:ext cx="2560320" cy="1554480"/>
           </a:xfrm>
           <a:prstGeom prst="roundRect">
             <a:avLst/>
@@ -11018,7 +11018,7 @@
         </p:nvSpPr>
         <p:spPr>
           <a:xfrm>
-            <a:off x="700887" y="2377440"/>
+            <a:off x="700887" y="2011680"/>
             <a:ext cx="2560320" cy="457200"/>
           </a:xfrm>
           <a:prstGeom prst="rect">
@@ -11034,7 +11034,7 @@
           <a:p>
             <a:pPr algn="ctr"/>
             <a:r>
-              <a:rPr sz="2400" b="1" i="0">
+              <a:rPr sz="2200" b="1" i="0">
                 <a:solidFill>
                   <a:srgbClr val="DC2626"/>
                 </a:solidFill>
@@ -11048,6 +11048,41 @@
       <p:sp>
         <p:nvSpPr>
           <p:cNvPr id="11" name="TextBox 10"/>
+          <p:cNvSpPr txBox="1"/>
+          <p:nvPr/>
+        </p:nvSpPr>
+        <p:spPr>
+          <a:xfrm>
+            <a:off x="700887" y="2514600"/>
+            <a:ext cx="2560320" cy="365760"/>
+          </a:xfrm>
+          <a:prstGeom prst="rect">
+            <a:avLst/>
+          </a:prstGeom>
+          <a:noFill/>
+        </p:spPr>
+        <p:txBody>
+          <a:bodyPr wrap="square">
+            <a:spAutoFit/>
+          </a:bodyPr>
+          <a:lstStyle/>
+          <a:p>
+            <a:pPr algn="ctr"/>
+            <a:r>
+              <a:rPr sz="1100" b="0" i="1">
+                <a:solidFill>
+                  <a:srgbClr val="6B6B6B"/>
+                </a:solidFill>
+                <a:latin typeface="Calibri"/>
+              </a:rPr>
+              <a:t>1. 最高</a:t>
+            </a:r>
+          </a:p>
+        </p:txBody>
+      </p:sp>
+      <p:sp>
+        <p:nvSpPr>
+          <p:cNvPr id="12" name="TextBox 11"/>
           <p:cNvSpPr txBox="1"/>
           <p:nvPr/>
         </p:nvSpPr>
@@ -11069,42 +11104,7 @@
           <a:p>
             <a:pPr algn="ctr"/>
             <a:r>
-              <a:rPr sz="1200" b="0" i="1">
-                <a:solidFill>
-                  <a:srgbClr val="6B6B6B"/>
-                </a:solidFill>
-                <a:latin typeface="Calibri"/>
-              </a:rPr>
-              <a:t>1. 最高</a:t>
-            </a:r>
-          </a:p>
-        </p:txBody>
-      </p:sp>
-      <p:sp>
-        <p:nvSpPr>
-          <p:cNvPr id="12" name="TextBox 11"/>
-          <p:cNvSpPr txBox="1"/>
-          <p:nvPr/>
-        </p:nvSpPr>
-        <p:spPr>
-          <a:xfrm>
-            <a:off x="700887" y="3383280"/>
-            <a:ext cx="2560320" cy="365760"/>
-          </a:xfrm>
-          <a:prstGeom prst="rect">
-            <a:avLst/>
-          </a:prstGeom>
-          <a:noFill/>
-        </p:spPr>
-        <p:txBody>
-          <a:bodyPr wrap="square">
-            <a:spAutoFit/>
-          </a:bodyPr>
-          <a:lstStyle/>
-          <a:p>
-            <a:pPr algn="ctr"/>
-            <a:r>
-              <a:rPr sz="1400" b="1" i="0">
+              <a:rPr sz="1300" b="1" i="0">
                 <a:solidFill>
                   <a:srgbClr val="2C2C2C"/>
                 </a:solidFill>
@@ -11123,7 +11123,7 @@
         </p:nvSpPr>
         <p:spPr>
           <a:xfrm>
-            <a:off x="3279495" y="2880360"/>
+            <a:off x="3279495" y="2468880"/>
             <a:ext cx="146304" cy="274320"/>
           </a:xfrm>
           <a:prstGeom prst="rightArrow">
@@ -11166,8 +11166,8 @@
         </p:nvSpPr>
         <p:spPr>
           <a:xfrm>
-            <a:off x="3444087" y="2103120"/>
-            <a:ext cx="2560320" cy="1828800"/>
+            <a:off x="3444087" y="1828800"/>
+            <a:ext cx="2560320" cy="1554480"/>
           </a:xfrm>
           <a:prstGeom prst="roundRect">
             <a:avLst/>
@@ -11211,7 +11211,7 @@
         </p:nvSpPr>
         <p:spPr>
           <a:xfrm>
-            <a:off x="3444087" y="2377440"/>
+            <a:off x="3444087" y="2011680"/>
             <a:ext cx="2560320" cy="457200"/>
           </a:xfrm>
           <a:prstGeom prst="rect">
@@ -11227,7 +11227,7 @@
           <a:p>
             <a:pPr algn="ctr"/>
             <a:r>
-              <a:rPr sz="2400" b="1" i="0">
+              <a:rPr sz="2200" b="1" i="0">
                 <a:solidFill>
                   <a:srgbClr val="C75A1A"/>
                 </a:solidFill>
@@ -11241,6 +11241,41 @@
       <p:sp>
         <p:nvSpPr>
           <p:cNvPr id="16" name="TextBox 15"/>
+          <p:cNvSpPr txBox="1"/>
+          <p:nvPr/>
+        </p:nvSpPr>
+        <p:spPr>
+          <a:xfrm>
+            <a:off x="3444087" y="2514600"/>
+            <a:ext cx="2560320" cy="365760"/>
+          </a:xfrm>
+          <a:prstGeom prst="rect">
+            <a:avLst/>
+          </a:prstGeom>
+          <a:noFill/>
+        </p:spPr>
+        <p:txBody>
+          <a:bodyPr wrap="square">
+            <a:spAutoFit/>
+          </a:bodyPr>
+          <a:lstStyle/>
+          <a:p>
+            <a:pPr algn="ctr"/>
+            <a:r>
+              <a:rPr sz="1100" b="0" i="1">
+                <a:solidFill>
+                  <a:srgbClr val="6B6B6B"/>
+                </a:solidFill>
+                <a:latin typeface="Calibri"/>
+              </a:rPr>
+              <a:t>2. 次高</a:t>
+            </a:r>
+          </a:p>
+        </p:txBody>
+      </p:sp>
+      <p:sp>
+        <p:nvSpPr>
+          <p:cNvPr id="17" name="TextBox 16"/>
           <p:cNvSpPr txBox="1"/>
           <p:nvPr/>
         </p:nvSpPr>
@@ -11262,42 +11297,7 @@
           <a:p>
             <a:pPr algn="ctr"/>
             <a:r>
-              <a:rPr sz="1200" b="0" i="1">
-                <a:solidFill>
-                  <a:srgbClr val="6B6B6B"/>
-                </a:solidFill>
-                <a:latin typeface="Calibri"/>
-              </a:rPr>
-              <a:t>2. 次高</a:t>
-            </a:r>
-          </a:p>
-        </p:txBody>
-      </p:sp>
-      <p:sp>
-        <p:nvSpPr>
-          <p:cNvPr id="17" name="TextBox 16"/>
-          <p:cNvSpPr txBox="1"/>
-          <p:nvPr/>
-        </p:nvSpPr>
-        <p:spPr>
-          <a:xfrm>
-            <a:off x="3444087" y="3383280"/>
-            <a:ext cx="2560320" cy="365760"/>
-          </a:xfrm>
-          <a:prstGeom prst="rect">
-            <a:avLst/>
-          </a:prstGeom>
-          <a:noFill/>
-        </p:spPr>
-        <p:txBody>
-          <a:bodyPr wrap="square">
-            <a:spAutoFit/>
-          </a:bodyPr>
-          <a:lstStyle/>
-          <a:p>
-            <a:pPr algn="ctr"/>
-            <a:r>
-              <a:rPr sz="1400" b="1" i="0">
+              <a:rPr sz="1300" b="1" i="0">
                 <a:solidFill>
                   <a:srgbClr val="2C2C2C"/>
                 </a:solidFill>
@@ -11316,7 +11316,7 @@
         </p:nvSpPr>
         <p:spPr>
           <a:xfrm>
-            <a:off x="6022695" y="2880360"/>
+            <a:off x="6022695" y="2468880"/>
             <a:ext cx="146304" cy="274320"/>
           </a:xfrm>
           <a:prstGeom prst="rightArrow">
@@ -11359,8 +11359,8 @@
         </p:nvSpPr>
         <p:spPr>
           <a:xfrm>
-            <a:off x="6187287" y="2103120"/>
-            <a:ext cx="2560320" cy="1828800"/>
+            <a:off x="6187287" y="1828800"/>
+            <a:ext cx="2560320" cy="1554480"/>
           </a:xfrm>
           <a:prstGeom prst="roundRect">
             <a:avLst/>
@@ -11404,7 +11404,7 @@
         </p:nvSpPr>
         <p:spPr>
           <a:xfrm>
-            <a:off x="6187287" y="2377440"/>
+            <a:off x="6187287" y="2011680"/>
             <a:ext cx="2560320" cy="457200"/>
           </a:xfrm>
           <a:prstGeom prst="rect">
@@ -11420,7 +11420,7 @@
           <a:p>
             <a:pPr algn="ctr"/>
             <a:r>
-              <a:rPr sz="2400" b="1" i="0">
+              <a:rPr sz="2200" b="1" i="0">
                 <a:solidFill>
                   <a:srgbClr val="3B82F6"/>
                 </a:solidFill>
@@ -11434,6 +11434,41 @@
       <p:sp>
         <p:nvSpPr>
           <p:cNvPr id="21" name="TextBox 20"/>
+          <p:cNvSpPr txBox="1"/>
+          <p:nvPr/>
+        </p:nvSpPr>
+        <p:spPr>
+          <a:xfrm>
+            <a:off x="6187287" y="2514600"/>
+            <a:ext cx="2560320" cy="365760"/>
+          </a:xfrm>
+          <a:prstGeom prst="rect">
+            <a:avLst/>
+          </a:prstGeom>
+          <a:noFill/>
+        </p:spPr>
+        <p:txBody>
+          <a:bodyPr wrap="square">
+            <a:spAutoFit/>
+          </a:bodyPr>
+          <a:lstStyle/>
+          <a:p>
+            <a:pPr algn="ctr"/>
+            <a:r>
+              <a:rPr sz="1100" b="0" i="1">
+                <a:solidFill>
+                  <a:srgbClr val="6B6B6B"/>
+                </a:solidFill>
+                <a:latin typeface="Calibri"/>
+              </a:rPr>
+              <a:t>3. 確認</a:t>
+            </a:r>
+          </a:p>
+        </p:txBody>
+      </p:sp>
+      <p:sp>
+        <p:nvSpPr>
+          <p:cNvPr id="22" name="TextBox 21"/>
           <p:cNvSpPr txBox="1"/>
           <p:nvPr/>
         </p:nvSpPr>
@@ -11455,42 +11490,7 @@
           <a:p>
             <a:pPr algn="ctr"/>
             <a:r>
-              <a:rPr sz="1200" b="0" i="1">
-                <a:solidFill>
-                  <a:srgbClr val="6B6B6B"/>
-                </a:solidFill>
-                <a:latin typeface="Calibri"/>
-              </a:rPr>
-              <a:t>3. 確認</a:t>
-            </a:r>
-          </a:p>
-        </p:txBody>
-      </p:sp>
-      <p:sp>
-        <p:nvSpPr>
-          <p:cNvPr id="22" name="TextBox 21"/>
-          <p:cNvSpPr txBox="1"/>
-          <p:nvPr/>
-        </p:nvSpPr>
-        <p:spPr>
-          <a:xfrm>
-            <a:off x="6187287" y="3383280"/>
-            <a:ext cx="2560320" cy="365760"/>
-          </a:xfrm>
-          <a:prstGeom prst="rect">
-            <a:avLst/>
-          </a:prstGeom>
-          <a:noFill/>
-        </p:spPr>
-        <p:txBody>
-          <a:bodyPr wrap="square">
-            <a:spAutoFit/>
-          </a:bodyPr>
-          <a:lstStyle/>
-          <a:p>
-            <a:pPr algn="ctr"/>
-            <a:r>
-              <a:rPr sz="1400" b="1" i="0">
+              <a:rPr sz="1300" b="1" i="0">
                 <a:solidFill>
                   <a:srgbClr val="2C2C2C"/>
                 </a:solidFill>
@@ -11509,7 +11509,7 @@
         </p:nvSpPr>
         <p:spPr>
           <a:xfrm>
-            <a:off x="8765895" y="2880360"/>
+            <a:off x="8765895" y="2468880"/>
             <a:ext cx="146304" cy="274320"/>
           </a:xfrm>
           <a:prstGeom prst="rightArrow">
@@ -11552,8 +11552,8 @@
         </p:nvSpPr>
         <p:spPr>
           <a:xfrm>
-            <a:off x="8930487" y="2103120"/>
-            <a:ext cx="2560320" cy="1828800"/>
+            <a:off x="8930487" y="1828800"/>
+            <a:ext cx="2560320" cy="1554480"/>
           </a:xfrm>
           <a:prstGeom prst="roundRect">
             <a:avLst/>
@@ -11597,7 +11597,7 @@
         </p:nvSpPr>
         <p:spPr>
           <a:xfrm>
-            <a:off x="8930487" y="2377440"/>
+            <a:off x="8930487" y="2011680"/>
             <a:ext cx="2560320" cy="457200"/>
           </a:xfrm>
           <a:prstGeom prst="rect">
@@ -11613,7 +11613,7 @@
           <a:p>
             <a:pPr algn="ctr"/>
             <a:r>
-              <a:rPr sz="2400" b="1" i="0">
+              <a:rPr sz="2200" b="1" i="0">
                 <a:solidFill>
                   <a:srgbClr val="16A34A"/>
                 </a:solidFill>
@@ -11627,6 +11627,41 @@
       <p:sp>
         <p:nvSpPr>
           <p:cNvPr id="26" name="TextBox 25"/>
+          <p:cNvSpPr txBox="1"/>
+          <p:nvPr/>
+        </p:nvSpPr>
+        <p:spPr>
+          <a:xfrm>
+            <a:off x="8930487" y="2514600"/>
+            <a:ext cx="2560320" cy="365760"/>
+          </a:xfrm>
+          <a:prstGeom prst="rect">
+            <a:avLst/>
+          </a:prstGeom>
+          <a:noFill/>
+        </p:spPr>
+        <p:txBody>
+          <a:bodyPr wrap="square">
+            <a:spAutoFit/>
+          </a:bodyPr>
+          <a:lstStyle/>
+          <a:p>
+            <a:pPr algn="ctr"/>
+            <a:r>
+              <a:rPr sz="1100" b="0" i="1">
+                <a:solidFill>
+                  <a:srgbClr val="6B6B6B"/>
+                </a:solidFill>
+                <a:latin typeface="Calibri"/>
+              </a:rPr>
+              <a:t>4. 最低</a:t>
+            </a:r>
+          </a:p>
+        </p:txBody>
+      </p:sp>
+      <p:sp>
+        <p:nvSpPr>
+          <p:cNvPr id="27" name="TextBox 26"/>
           <p:cNvSpPr txBox="1"/>
           <p:nvPr/>
         </p:nvSpPr>
@@ -11648,42 +11683,7 @@
           <a:p>
             <a:pPr algn="ctr"/>
             <a:r>
-              <a:rPr sz="1200" b="0" i="1">
-                <a:solidFill>
-                  <a:srgbClr val="6B6B6B"/>
-                </a:solidFill>
-                <a:latin typeface="Calibri"/>
-              </a:rPr>
-              <a:t>4. 最低</a:t>
-            </a:r>
-          </a:p>
-        </p:txBody>
-      </p:sp>
-      <p:sp>
-        <p:nvSpPr>
-          <p:cNvPr id="27" name="TextBox 26"/>
-          <p:cNvSpPr txBox="1"/>
-          <p:nvPr/>
-        </p:nvSpPr>
-        <p:spPr>
-          <a:xfrm>
-            <a:off x="8930487" y="3383280"/>
-            <a:ext cx="2560320" cy="365760"/>
-          </a:xfrm>
-          <a:prstGeom prst="rect">
-            <a:avLst/>
-          </a:prstGeom>
-          <a:noFill/>
-        </p:spPr>
-        <p:txBody>
-          <a:bodyPr wrap="square">
-            <a:spAutoFit/>
-          </a:bodyPr>
-          <a:lstStyle/>
-          <a:p>
-            <a:pPr algn="ctr"/>
-            <a:r>
-              <a:rPr sz="1400" b="1" i="0">
+              <a:rPr sz="1300" b="1" i="0">
                 <a:solidFill>
                   <a:srgbClr val="2C2C2C"/>
                 </a:solidFill>
@@ -11702,7 +11702,7 @@
         </p:nvSpPr>
         <p:spPr>
           <a:xfrm>
-            <a:off x="457200" y="4389120"/>
+            <a:off x="457200" y="3657600"/>
             <a:ext cx="11277295" cy="365760"/>
           </a:xfrm>
           <a:prstGeom prst="rect">
@@ -11737,8 +11737,8 @@
         </p:nvSpPr>
         <p:spPr>
           <a:xfrm>
-            <a:off x="1828800" y="4937760"/>
-            <a:ext cx="8534095" cy="1188720"/>
+            <a:off x="1828800" y="4206240"/>
+            <a:ext cx="8534095" cy="1371600"/>
           </a:xfrm>
           <a:prstGeom prst="rect">
             <a:avLst/>
@@ -11780,8 +11780,8 @@
         </p:nvSpPr>
         <p:spPr>
           <a:xfrm>
-            <a:off x="1828800" y="4937760"/>
-            <a:ext cx="8534095" cy="1188720"/>
+            <a:off x="1828800" y="4206240"/>
+            <a:ext cx="8534095" cy="1371600"/>
           </a:xfrm>
           <a:prstGeom prst="rect">
             <a:avLst/>
@@ -14571,8 +14571,8 @@
         </p:nvSpPr>
         <p:spPr>
           <a:xfrm>
-            <a:off x="457200" y="1554480"/>
-            <a:ext cx="6400800" cy="2286000"/>
+            <a:off x="457200" y="1371600"/>
+            <a:ext cx="6400800" cy="2560320"/>
           </a:xfrm>
           <a:prstGeom prst="rect">
             <a:avLst/>
@@ -14614,8 +14614,8 @@
         </p:nvSpPr>
         <p:spPr>
           <a:xfrm>
-            <a:off x="457200" y="1554480"/>
-            <a:ext cx="6400800" cy="2286000"/>
+            <a:off x="457200" y="1371600"/>
+            <a:ext cx="6400800" cy="2560320"/>
           </a:xfrm>
           <a:prstGeom prst="rect">
             <a:avLst/>
@@ -14630,7 +14630,7 @@
           <a:p>
             <a:pPr algn="l"/>
             <a:r>
-              <a:rPr sz="1100">
+              <a:rPr sz="1000">
                 <a:solidFill>
                   <a:srgbClr val="E6E6E6"/>
                 </a:solidFill>
@@ -14642,7 +14642,7 @@
           <a:p>
             <a:pPr algn="l"/>
             <a:r>
-              <a:rPr sz="1100">
+              <a:rPr sz="1000">
                 <a:solidFill>
                   <a:srgbClr val="E6E6E6"/>
                 </a:solidFill>
@@ -14654,7 +14654,7 @@
           <a:p>
             <a:pPr algn="l"/>
             <a:r>
-              <a:rPr sz="1100">
+              <a:rPr sz="1000">
                 <a:solidFill>
                   <a:srgbClr val="E6E6E6"/>
                 </a:solidFill>
@@ -14666,7 +14666,7 @@
           <a:p>
             <a:pPr algn="l"/>
             <a:r>
-              <a:rPr sz="1100">
+              <a:rPr sz="1000">
                 <a:solidFill>
                   <a:srgbClr val="E6E6E6"/>
                 </a:solidFill>
@@ -14678,7 +14678,7 @@
           <a:p>
             <a:pPr algn="l"/>
             <a:r>
-              <a:rPr sz="1100">
+              <a:rPr sz="1000">
                 <a:solidFill>
                   <a:srgbClr val="E6E6E6"/>
                 </a:solidFill>
@@ -14690,7 +14690,7 @@
           <a:p>
             <a:pPr algn="l"/>
             <a:r>
-              <a:rPr sz="1100">
+              <a:rPr sz="1000">
                 <a:solidFill>
                   <a:srgbClr val="E6E6E6"/>
                 </a:solidFill>
@@ -14702,7 +14702,7 @@
           <a:p>
             <a:pPr algn="l"/>
             <a:r>
-              <a:rPr sz="1100">
+              <a:rPr sz="1000">
                 <a:solidFill>
                   <a:srgbClr val="E6E6E6"/>
                 </a:solidFill>
@@ -14714,7 +14714,7 @@
           <a:p>
             <a:pPr algn="l"/>
             <a:r>
-              <a:rPr sz="1100">
+              <a:rPr sz="1000">
                 <a:solidFill>
                   <a:srgbClr val="E6E6E6"/>
                 </a:solidFill>
@@ -14726,7 +14726,7 @@
           <a:p>
             <a:pPr algn="l"/>
             <a:r>
-              <a:rPr sz="1100">
+              <a:rPr sz="1000">
                 <a:solidFill>
                   <a:srgbClr val="E6E6E6"/>
                 </a:solidFill>
@@ -14738,7 +14738,7 @@
           <a:p>
             <a:pPr algn="l"/>
             <a:r>
-              <a:rPr sz="1100">
+              <a:rPr sz="1000">
                 <a:solidFill>
                   <a:srgbClr val="E6E6E6"/>
                 </a:solidFill>
@@ -14750,7 +14750,7 @@
           <a:p>
             <a:pPr algn="l"/>
             <a:r>
-              <a:rPr sz="1100">
+              <a:rPr sz="1000">
                 <a:solidFill>
                   <a:srgbClr val="E6E6E6"/>
                 </a:solidFill>
@@ -14762,7 +14762,7 @@
           <a:p>
             <a:pPr algn="l"/>
             <a:r>
-              <a:rPr sz="1100">
+              <a:rPr sz="1000">
                 <a:solidFill>
                   <a:srgbClr val="E6E6E6"/>
                 </a:solidFill>
@@ -14774,7 +14774,7 @@
           <a:p>
             <a:pPr algn="l"/>
             <a:r>
-              <a:rPr sz="1100">
+              <a:rPr sz="1000">
                 <a:solidFill>
                   <a:srgbClr val="E6E6E6"/>
                 </a:solidFill>
@@ -14786,7 +14786,7 @@
           <a:p>
             <a:pPr algn="l"/>
             <a:r>
-              <a:rPr sz="1100">
+              <a:rPr sz="1000">
                 <a:solidFill>
                   <a:srgbClr val="E6E6E6"/>
                 </a:solidFill>
@@ -14798,7 +14798,7 @@
           <a:p>
             <a:pPr algn="l"/>
             <a:r>
-              <a:rPr sz="1100">
+              <a:rPr sz="1000">
                 <a:solidFill>
                   <a:srgbClr val="E6E6E6"/>
                 </a:solidFill>
@@ -14810,7 +14810,7 @@
           <a:p>
             <a:pPr algn="l"/>
             <a:r>
-              <a:rPr sz="1100">
+              <a:rPr sz="1000">
                 <a:solidFill>
                   <a:srgbClr val="E6E6E6"/>
                 </a:solidFill>
@@ -14829,7 +14829,7 @@
         </p:nvSpPr>
         <p:spPr>
           <a:xfrm>
-            <a:off x="7162495" y="1554480"/>
+            <a:off x="7162495" y="1371600"/>
             <a:ext cx="4572000" cy="365760"/>
           </a:xfrm>
           <a:prstGeom prst="rect">
@@ -14864,8 +14864,8 @@
         </p:nvSpPr>
         <p:spPr>
           <a:xfrm>
-            <a:off x="7162495" y="1920240"/>
-            <a:ext cx="4572000" cy="2286000"/>
+            <a:off x="7162495" y="1737360"/>
+            <a:ext cx="4572000" cy="2377440"/>
           </a:xfrm>
           <a:prstGeom prst="rect">
             <a:avLst/>
@@ -14907,8 +14907,8 @@
         </p:nvSpPr>
         <p:spPr>
           <a:xfrm>
-            <a:off x="7162495" y="1920240"/>
-            <a:ext cx="4572000" cy="2286000"/>
+            <a:off x="7162495" y="1737360"/>
+            <a:ext cx="4572000" cy="2377440"/>
           </a:xfrm>
           <a:prstGeom prst="rect">
             <a:avLst/>
@@ -15086,7 +15086,7 @@
         </p:nvSpPr>
         <p:spPr>
           <a:xfrm>
-            <a:off x="457200" y="4206240"/>
+            <a:off x="457200" y="4023360"/>
             <a:ext cx="11277295" cy="365760"/>
           </a:xfrm>
           <a:prstGeom prst="roundRect">
@@ -15140,7 +15140,7 @@
         </p:nvSpPr>
         <p:spPr>
           <a:xfrm>
-            <a:off x="457200" y="4754880"/>
+            <a:off x="457200" y="4526280"/>
             <a:ext cx="11277295" cy="365760"/>
           </a:xfrm>
           <a:prstGeom prst="rect">
@@ -15175,8 +15175,8 @@
         </p:nvSpPr>
         <p:spPr>
           <a:xfrm>
-            <a:off x="457200" y="5120640"/>
-            <a:ext cx="10972800" cy="1097280"/>
+            <a:off x="457200" y="4892040"/>
+            <a:ext cx="10972800" cy="1280160"/>
           </a:xfrm>
           <a:prstGeom prst="rect">
             <a:avLst/>
@@ -15478,8 +15478,8 @@
         </p:nvSpPr>
         <p:spPr>
           <a:xfrm>
-            <a:off x="457200" y="1554480"/>
-            <a:ext cx="11277295" cy="2286000"/>
+            <a:off x="457200" y="1371600"/>
+            <a:ext cx="11277295" cy="2651760"/>
           </a:xfrm>
           <a:prstGeom prst="rect">
             <a:avLst/>
@@ -15521,8 +15521,8 @@
         </p:nvSpPr>
         <p:spPr>
           <a:xfrm>
-            <a:off x="457200" y="1554480"/>
-            <a:ext cx="11277295" cy="2286000"/>
+            <a:off x="457200" y="1371600"/>
+            <a:ext cx="11277295" cy="2651760"/>
           </a:xfrm>
           <a:prstGeom prst="rect">
             <a:avLst/>
@@ -15537,7 +15537,7 @@
           <a:p>
             <a:pPr algn="l"/>
             <a:r>
-              <a:rPr sz="1100">
+              <a:rPr sz="1000">
                 <a:solidFill>
                   <a:srgbClr val="E6E6E6"/>
                 </a:solidFill>
@@ -15549,7 +15549,7 @@
           <a:p>
             <a:pPr algn="l"/>
             <a:r>
-              <a:rPr sz="1100">
+              <a:rPr sz="1000">
                 <a:solidFill>
                   <a:srgbClr val="E6E6E6"/>
                 </a:solidFill>
@@ -15561,7 +15561,7 @@
           <a:p>
             <a:pPr algn="l"/>
             <a:r>
-              <a:rPr sz="1100">
+              <a:rPr sz="1000">
                 <a:solidFill>
                   <a:srgbClr val="E6E6E6"/>
                 </a:solidFill>
@@ -15573,7 +15573,7 @@
           <a:p>
             <a:pPr algn="l"/>
             <a:r>
-              <a:rPr sz="1100">
+              <a:rPr sz="1000">
                 <a:solidFill>
                   <a:srgbClr val="E6E6E6"/>
                 </a:solidFill>
@@ -15585,7 +15585,7 @@
           <a:p>
             <a:pPr algn="l"/>
             <a:r>
-              <a:rPr sz="1100">
+              <a:rPr sz="1000">
                 <a:solidFill>
                   <a:srgbClr val="E6E6E6"/>
                 </a:solidFill>
@@ -15597,7 +15597,7 @@
           <a:p>
             <a:pPr algn="l"/>
             <a:r>
-              <a:rPr sz="1100">
+              <a:rPr sz="1000">
                 <a:solidFill>
                   <a:srgbClr val="E6E6E6"/>
                 </a:solidFill>
@@ -15609,7 +15609,7 @@
           <a:p>
             <a:pPr algn="l"/>
             <a:r>
-              <a:rPr sz="1100">
+              <a:rPr sz="1000">
                 <a:solidFill>
                   <a:srgbClr val="E6E6E6"/>
                 </a:solidFill>
@@ -15621,7 +15621,7 @@
           <a:p>
             <a:pPr algn="l"/>
             <a:r>
-              <a:rPr sz="1100">
+              <a:rPr sz="1000">
                 <a:solidFill>
                   <a:srgbClr val="E6E6E6"/>
                 </a:solidFill>
@@ -15633,7 +15633,7 @@
           <a:p>
             <a:pPr algn="l"/>
             <a:r>
-              <a:rPr sz="1100">
+              <a:rPr sz="1000">
                 <a:solidFill>
                   <a:srgbClr val="E6E6E6"/>
                 </a:solidFill>
@@ -15645,7 +15645,7 @@
           <a:p>
             <a:pPr algn="l"/>
             <a:r>
-              <a:rPr sz="1100">
+              <a:rPr sz="1000">
                 <a:solidFill>
                   <a:srgbClr val="E6E6E6"/>
                 </a:solidFill>
@@ -15657,7 +15657,7 @@
           <a:p>
             <a:pPr algn="l"/>
             <a:r>
-              <a:rPr sz="1100">
+              <a:rPr sz="1000">
                 <a:solidFill>
                   <a:srgbClr val="E6E6E6"/>
                 </a:solidFill>
@@ -15669,7 +15669,7 @@
           <a:p>
             <a:pPr algn="l"/>
             <a:r>
-              <a:rPr sz="1100">
+              <a:rPr sz="1000">
                 <a:solidFill>
                   <a:srgbClr val="E6E6E6"/>
                 </a:solidFill>
@@ -15681,7 +15681,7 @@
           <a:p>
             <a:pPr algn="l"/>
             <a:r>
-              <a:rPr sz="1100">
+              <a:rPr sz="1000">
                 <a:solidFill>
                   <a:srgbClr val="E6E6E6"/>
                 </a:solidFill>
@@ -15693,7 +15693,7 @@
           <a:p>
             <a:pPr algn="l"/>
             <a:r>
-              <a:rPr sz="1100">
+              <a:rPr sz="1000">
                 <a:solidFill>
                   <a:srgbClr val="E6E6E6"/>
                 </a:solidFill>
@@ -15705,7 +15705,7 @@
           <a:p>
             <a:pPr algn="l"/>
             <a:r>
-              <a:rPr sz="1100">
+              <a:rPr sz="1000">
                 <a:solidFill>
                   <a:srgbClr val="E6E6E6"/>
                 </a:solidFill>
@@ -15717,7 +15717,7 @@
           <a:p>
             <a:pPr algn="l"/>
             <a:r>
-              <a:rPr sz="1100">
+              <a:rPr sz="1000">
                 <a:solidFill>
                   <a:srgbClr val="E6E6E6"/>
                 </a:solidFill>
@@ -15729,7 +15729,7 @@
           <a:p>
             <a:pPr algn="l"/>
             <a:r>
-              <a:rPr sz="1100">
+              <a:rPr sz="1000">
                 <a:solidFill>
                   <a:srgbClr val="E6E6E6"/>
                 </a:solidFill>
@@ -15748,7 +15748,7 @@
         </p:nvSpPr>
         <p:spPr>
           <a:xfrm>
-            <a:off x="457200" y="4023360"/>
+            <a:off x="457200" y="4160520"/>
             <a:ext cx="11277295" cy="365760"/>
           </a:xfrm>
           <a:prstGeom prst="rect">
@@ -15783,8 +15783,8 @@
         </p:nvSpPr>
         <p:spPr>
           <a:xfrm>
-            <a:off x="457200" y="4389120"/>
-            <a:ext cx="11277295" cy="1371600"/>
+            <a:off x="457200" y="4572000"/>
+            <a:ext cx="11277295" cy="1554480"/>
           </a:xfrm>
           <a:prstGeom prst="rect">
             <a:avLst/>
@@ -15826,8 +15826,8 @@
         </p:nvSpPr>
         <p:spPr>
           <a:xfrm>
-            <a:off x="457200" y="4389120"/>
-            <a:ext cx="11277295" cy="1371600"/>
+            <a:off x="457200" y="4572000"/>
+            <a:ext cx="11277295" cy="1554480"/>
           </a:xfrm>
           <a:prstGeom prst="rect">
             <a:avLst/>
@@ -15933,7 +15933,7 @@
         </p:nvSpPr>
         <p:spPr>
           <a:xfrm>
-            <a:off x="457200" y="5943600"/>
+            <a:off x="457200" y="6217920"/>
             <a:ext cx="11277295" cy="365760"/>
           </a:xfrm>
           <a:prstGeom prst="roundRect">
@@ -16231,8 +16231,8 @@
         </p:nvSpPr>
         <p:spPr>
           <a:xfrm>
-            <a:off x="457200" y="1554480"/>
-            <a:ext cx="6400800" cy="2286000"/>
+            <a:off x="457200" y="1371600"/>
+            <a:ext cx="6400800" cy="2377440"/>
           </a:xfrm>
           <a:prstGeom prst="rect">
             <a:avLst/>
@@ -16274,8 +16274,8 @@
         </p:nvSpPr>
         <p:spPr>
           <a:xfrm>
-            <a:off x="457200" y="1554480"/>
-            <a:ext cx="6400800" cy="2286000"/>
+            <a:off x="457200" y="1371600"/>
+            <a:ext cx="6400800" cy="2377440"/>
           </a:xfrm>
           <a:prstGeom prst="rect">
             <a:avLst/>
@@ -16290,13 +16290,263 @@
           <a:p>
             <a:pPr algn="l"/>
             <a:r>
+              <a:rPr sz="900">
+                <a:solidFill>
+                  <a:srgbClr val="E6E6E6"/>
+                </a:solidFill>
+                <a:latin typeface="Consolas"/>
+              </a:rPr>
+              <a:t>// 載入專案 context</a:t>
+            </a:r>
+          </a:p>
+          <a:p>
+            <a:pPr algn="l"/>
+            <a:r>
+              <a:rPr sz="900">
+                <a:solidFill>
+                  <a:srgbClr val="E6E6E6"/>
+                </a:solidFill>
+                <a:latin typeface="Consolas"/>
+              </a:rPr>
+              <a:t>{</a:t>
+            </a:r>
+          </a:p>
+          <a:p>
+            <a:pPr algn="l"/>
+            <a:r>
+              <a:rPr sz="900">
+                <a:solidFill>
+                  <a:srgbClr val="E6E6E6"/>
+                </a:solidFill>
+                <a:latin typeface="Consolas"/>
+              </a:rPr>
+              <a:t>  "hooks": {</a:t>
+            </a:r>
+          </a:p>
+          <a:p>
+            <a:pPr algn="l"/>
+            <a:r>
+              <a:rPr sz="900">
+                <a:solidFill>
+                  <a:srgbClr val="E6E6E6"/>
+                </a:solidFill>
+                <a:latin typeface="Consolas"/>
+              </a:rPr>
+              <a:t>    "SessionStart": [</a:t>
+            </a:r>
+          </a:p>
+          <a:p>
+            <a:pPr algn="l"/>
+            <a:r>
+              <a:rPr sz="900">
+                <a:solidFill>
+                  <a:srgbClr val="E6E6E6"/>
+                </a:solidFill>
+                <a:latin typeface="Consolas"/>
+              </a:rPr>
+              <a:t>      {</a:t>
+            </a:r>
+          </a:p>
+          <a:p>
+            <a:pPr algn="l"/>
+            <a:r>
+              <a:rPr sz="900">
+                <a:solidFill>
+                  <a:srgbClr val="E6E6E6"/>
+                </a:solidFill>
+                <a:latin typeface="Consolas"/>
+              </a:rPr>
+              <a:t>        "matcher": "compact",    // 只在 compaction 後</a:t>
+            </a:r>
+          </a:p>
+          <a:p>
+            <a:pPr algn="l"/>
+            <a:r>
+              <a:rPr sz="900">
+                <a:solidFill>
+                  <a:srgbClr val="E6E6E6"/>
+                </a:solidFill>
+                <a:latin typeface="Consolas"/>
+              </a:rPr>
+              <a:t>        "hooks": [</a:t>
+            </a:r>
+          </a:p>
+          <a:p>
+            <a:pPr algn="l"/>
+            <a:r>
+              <a:rPr sz="900">
+                <a:solidFill>
+                  <a:srgbClr val="E6E6E6"/>
+                </a:solidFill>
+                <a:latin typeface="Consolas"/>
+              </a:rPr>
+              <a:t>          {</a:t>
+            </a:r>
+          </a:p>
+          <a:p>
+            <a:pPr algn="l"/>
+            <a:r>
+              <a:rPr sz="900">
+                <a:solidFill>
+                  <a:srgbClr val="E6E6E6"/>
+                </a:solidFill>
+                <a:latin typeface="Consolas"/>
+              </a:rPr>
+              <a:t>            "type": "command",</a:t>
+            </a:r>
+          </a:p>
+          <a:p>
+            <a:pPr algn="l"/>
+            <a:r>
+              <a:rPr sz="900">
+                <a:solidFill>
+                  <a:srgbClr val="E6E6E6"/>
+                </a:solidFill>
+                <a:latin typeface="Consolas"/>
+              </a:rPr>
+              <a:t>            "command": "echo 'Reminder: use Bun, not npm. Run bun test before committing.'"</a:t>
+            </a:r>
+          </a:p>
+          <a:p>
+            <a:pPr algn="l"/>
+            <a:r>
+              <a:rPr sz="900">
+                <a:solidFill>
+                  <a:srgbClr val="E6E6E6"/>
+                </a:solidFill>
+                <a:latin typeface="Consolas"/>
+              </a:rPr>
+              <a:t>          }</a:t>
+            </a:r>
+          </a:p>
+          <a:p>
+            <a:pPr algn="l"/>
+            <a:r>
+              <a:rPr sz="900">
+                <a:solidFill>
+                  <a:srgbClr val="E6E6E6"/>
+                </a:solidFill>
+                <a:latin typeface="Consolas"/>
+              </a:rPr>
+              <a:t>        ]</a:t>
+            </a:r>
+          </a:p>
+          <a:p>
+            <a:pPr algn="l"/>
+            <a:r>
+              <a:rPr sz="900">
+                <a:solidFill>
+                  <a:srgbClr val="E6E6E6"/>
+                </a:solidFill>
+                <a:latin typeface="Consolas"/>
+              </a:rPr>
+              <a:t>      }</a:t>
+            </a:r>
+          </a:p>
+          <a:p>
+            <a:pPr algn="l"/>
+            <a:r>
+              <a:rPr sz="900">
+                <a:solidFill>
+                  <a:srgbClr val="E6E6E6"/>
+                </a:solidFill>
+                <a:latin typeface="Consolas"/>
+              </a:rPr>
+              <a:t>    ]</a:t>
+            </a:r>
+          </a:p>
+          <a:p>
+            <a:pPr algn="l"/>
+            <a:r>
+              <a:rPr sz="900">
+                <a:solidFill>
+                  <a:srgbClr val="E6E6E6"/>
+                </a:solidFill>
+                <a:latin typeface="Consolas"/>
+              </a:rPr>
+              <a:t>  }</a:t>
+            </a:r>
+          </a:p>
+          <a:p>
+            <a:pPr algn="l"/>
+            <a:r>
+              <a:rPr sz="900">
+                <a:solidFill>
+                  <a:srgbClr val="E6E6E6"/>
+                </a:solidFill>
+                <a:latin typeface="Consolas"/>
+              </a:rPr>
+              <a:t>}</a:t>
+            </a:r>
+          </a:p>
+        </p:txBody>
+      </p:sp>
+      <p:sp>
+        <p:nvSpPr>
+          <p:cNvPr id="10" name="TextBox 9"/>
+          <p:cNvSpPr txBox="1"/>
+          <p:nvPr/>
+        </p:nvSpPr>
+        <p:spPr>
+          <a:xfrm>
+            <a:off x="7162495" y="1371600"/>
+            <a:ext cx="4572000" cy="365760"/>
+          </a:xfrm>
+          <a:prstGeom prst="rect">
+            <a:avLst/>
+          </a:prstGeom>
+          <a:noFill/>
+        </p:spPr>
+        <p:txBody>
+          <a:bodyPr wrap="square">
+            <a:spAutoFit/>
+          </a:bodyPr>
+          <a:lstStyle/>
+          <a:p>
+            <a:pPr algn="l"/>
+            <a:r>
+              <a:rPr sz="1300" b="1" i="0">
+                <a:solidFill>
+                  <a:srgbClr val="3B82F6"/>
+                </a:solidFill>
+                <a:latin typeface="Calibri"/>
+              </a:rPr>
+              <a:t>SessionStart matchers</a:t>
+            </a:r>
+          </a:p>
+        </p:txBody>
+      </p:sp>
+      <p:sp>
+        <p:nvSpPr>
+          <p:cNvPr id="11" name="TextBox 10"/>
+          <p:cNvSpPr txBox="1"/>
+          <p:nvPr/>
+        </p:nvSpPr>
+        <p:spPr>
+          <a:xfrm>
+            <a:off x="7162495" y="1737360"/>
+            <a:ext cx="4572000" cy="2011680"/>
+          </a:xfrm>
+          <a:prstGeom prst="rect">
+            <a:avLst/>
+          </a:prstGeom>
+          <a:noFill/>
+        </p:spPr>
+        <p:txBody>
+          <a:bodyPr wrap="square">
+            <a:spAutoFit/>
+          </a:bodyPr>
+          <a:lstStyle/>
+          <a:p>
+            <a:pPr algn="l"/>
+            <a:r>
               <a:rPr sz="1100">
                 <a:solidFill>
-                  <a:srgbClr val="E6E6E6"/>
-                </a:solidFill>
-                <a:latin typeface="Consolas"/>
-              </a:rPr>
-              <a:t>// 載入專案 context</a:t>
+                  <a:srgbClr val="2C2C2C"/>
+                </a:solidFill>
+                <a:latin typeface="Calibri"/>
+              </a:rPr>
+              <a:t>• startup — 新 session</a:t>
             </a:r>
           </a:p>
           <a:p>
@@ -16304,11 +16554,11 @@
             <a:r>
               <a:rPr sz="1100">
                 <a:solidFill>
-                  <a:srgbClr val="E6E6E6"/>
-                </a:solidFill>
-                <a:latin typeface="Consolas"/>
-              </a:rPr>
-              <a:t>{</a:t>
+                  <a:srgbClr val="2C2C2C"/>
+                </a:solidFill>
+                <a:latin typeface="Calibri"/>
+              </a:rPr>
+              <a:t>• resume — /resume 或 --continue</a:t>
             </a:r>
           </a:p>
           <a:p>
@@ -16316,11 +16566,11 @@
             <a:r>
               <a:rPr sz="1100">
                 <a:solidFill>
-                  <a:srgbClr val="E6E6E6"/>
-                </a:solidFill>
-                <a:latin typeface="Consolas"/>
-              </a:rPr>
-              <a:t>  "hooks": {</a:t>
+                  <a:srgbClr val="2C2C2C"/>
+                </a:solidFill>
+                <a:latin typeface="Calibri"/>
+              </a:rPr>
+              <a:t>• clear — /clear</a:t>
             </a:r>
           </a:p>
           <a:p>
@@ -16328,11 +16578,11 @@
             <a:r>
               <a:rPr sz="1100">
                 <a:solidFill>
-                  <a:srgbClr val="E6E6E6"/>
-                </a:solidFill>
-                <a:latin typeface="Consolas"/>
-              </a:rPr>
-              <a:t>    "SessionStart": [</a:t>
+                  <a:srgbClr val="2C2C2C"/>
+                </a:solidFill>
+                <a:latin typeface="Calibri"/>
+              </a:rPr>
+              <a:t>• compact — auto/manual compaction</a:t>
             </a:r>
           </a:p>
           <a:p>
@@ -16340,260 +16590,10 @@
             <a:r>
               <a:rPr sz="1100">
                 <a:solidFill>
-                  <a:srgbClr val="E6E6E6"/>
-                </a:solidFill>
-                <a:latin typeface="Consolas"/>
-              </a:rPr>
-              <a:t>      {</a:t>
-            </a:r>
-          </a:p>
-          <a:p>
-            <a:pPr algn="l"/>
-            <a:r>
-              <a:rPr sz="1100">
-                <a:solidFill>
-                  <a:srgbClr val="E6E6E6"/>
-                </a:solidFill>
-                <a:latin typeface="Consolas"/>
-              </a:rPr>
-              <a:t>        "matcher": "compact",    // 只在 compaction 後</a:t>
-            </a:r>
-          </a:p>
-          <a:p>
-            <a:pPr algn="l"/>
-            <a:r>
-              <a:rPr sz="1100">
-                <a:solidFill>
-                  <a:srgbClr val="E6E6E6"/>
-                </a:solidFill>
-                <a:latin typeface="Consolas"/>
-              </a:rPr>
-              <a:t>        "hooks": [</a:t>
-            </a:r>
-          </a:p>
-          <a:p>
-            <a:pPr algn="l"/>
-            <a:r>
-              <a:rPr sz="1100">
-                <a:solidFill>
-                  <a:srgbClr val="E6E6E6"/>
-                </a:solidFill>
-                <a:latin typeface="Consolas"/>
-              </a:rPr>
-              <a:t>          {</a:t>
-            </a:r>
-          </a:p>
-          <a:p>
-            <a:pPr algn="l"/>
-            <a:r>
-              <a:rPr sz="1100">
-                <a:solidFill>
-                  <a:srgbClr val="E6E6E6"/>
-                </a:solidFill>
-                <a:latin typeface="Consolas"/>
-              </a:rPr>
-              <a:t>            "type": "command",</a:t>
-            </a:r>
-          </a:p>
-          <a:p>
-            <a:pPr algn="l"/>
-            <a:r>
-              <a:rPr sz="1100">
-                <a:solidFill>
-                  <a:srgbClr val="E6E6E6"/>
-                </a:solidFill>
-                <a:latin typeface="Consolas"/>
-              </a:rPr>
-              <a:t>            "command": "echo 'Reminder: use Bun, not npm. Run bun test before committing.'"</a:t>
-            </a:r>
-          </a:p>
-          <a:p>
-            <a:pPr algn="l"/>
-            <a:r>
-              <a:rPr sz="1100">
-                <a:solidFill>
-                  <a:srgbClr val="E6E6E6"/>
-                </a:solidFill>
-                <a:latin typeface="Consolas"/>
-              </a:rPr>
-              <a:t>          }</a:t>
-            </a:r>
-          </a:p>
-          <a:p>
-            <a:pPr algn="l"/>
-            <a:r>
-              <a:rPr sz="1100">
-                <a:solidFill>
-                  <a:srgbClr val="E6E6E6"/>
-                </a:solidFill>
-                <a:latin typeface="Consolas"/>
-              </a:rPr>
-              <a:t>        ]</a:t>
-            </a:r>
-          </a:p>
-          <a:p>
-            <a:pPr algn="l"/>
-            <a:r>
-              <a:rPr sz="1100">
-                <a:solidFill>
-                  <a:srgbClr val="E6E6E6"/>
-                </a:solidFill>
-                <a:latin typeface="Consolas"/>
-              </a:rPr>
-              <a:t>      }</a:t>
-            </a:r>
-          </a:p>
-          <a:p>
-            <a:pPr algn="l"/>
-            <a:r>
-              <a:rPr sz="1100">
-                <a:solidFill>
-                  <a:srgbClr val="E6E6E6"/>
-                </a:solidFill>
-                <a:latin typeface="Consolas"/>
-              </a:rPr>
-              <a:t>    ]</a:t>
-            </a:r>
-          </a:p>
-          <a:p>
-            <a:pPr algn="l"/>
-            <a:r>
-              <a:rPr sz="1100">
-                <a:solidFill>
-                  <a:srgbClr val="E6E6E6"/>
-                </a:solidFill>
-                <a:latin typeface="Consolas"/>
-              </a:rPr>
-              <a:t>  }</a:t>
-            </a:r>
-          </a:p>
-          <a:p>
-            <a:pPr algn="l"/>
-            <a:r>
-              <a:rPr sz="1100">
-                <a:solidFill>
-                  <a:srgbClr val="E6E6E6"/>
-                </a:solidFill>
-                <a:latin typeface="Consolas"/>
-              </a:rPr>
-              <a:t>}</a:t>
-            </a:r>
-          </a:p>
-        </p:txBody>
-      </p:sp>
-      <p:sp>
-        <p:nvSpPr>
-          <p:cNvPr id="10" name="TextBox 9"/>
-          <p:cNvSpPr txBox="1"/>
-          <p:nvPr/>
-        </p:nvSpPr>
-        <p:spPr>
-          <a:xfrm>
-            <a:off x="7162495" y="1554480"/>
-            <a:ext cx="4572000" cy="365760"/>
-          </a:xfrm>
-          <a:prstGeom prst="rect">
-            <a:avLst/>
-          </a:prstGeom>
-          <a:noFill/>
-        </p:spPr>
-        <p:txBody>
-          <a:bodyPr wrap="square">
-            <a:spAutoFit/>
-          </a:bodyPr>
-          <a:lstStyle/>
-          <a:p>
-            <a:pPr algn="l"/>
-            <a:r>
-              <a:rPr sz="1300" b="1" i="0">
-                <a:solidFill>
-                  <a:srgbClr val="3B82F6"/>
-                </a:solidFill>
-                <a:latin typeface="Calibri"/>
-              </a:rPr>
-              <a:t>SessionStart matchers</a:t>
-            </a:r>
-          </a:p>
-        </p:txBody>
-      </p:sp>
-      <p:sp>
-        <p:nvSpPr>
-          <p:cNvPr id="11" name="TextBox 10"/>
-          <p:cNvSpPr txBox="1"/>
-          <p:nvPr/>
-        </p:nvSpPr>
-        <p:spPr>
-          <a:xfrm>
-            <a:off x="7162495" y="1920240"/>
-            <a:ext cx="4572000" cy="2286000"/>
-          </a:xfrm>
-          <a:prstGeom prst="rect">
-            <a:avLst/>
-          </a:prstGeom>
-          <a:noFill/>
-        </p:spPr>
-        <p:txBody>
-          <a:bodyPr wrap="square">
-            <a:spAutoFit/>
-          </a:bodyPr>
-          <a:lstStyle/>
-          <a:p>
-            <a:pPr algn="l"/>
-            <a:r>
-              <a:rPr sz="1100">
-                <a:solidFill>
                   <a:srgbClr val="2C2C2C"/>
                 </a:solidFill>
                 <a:latin typeface="Calibri"/>
               </a:rPr>
-              <a:t>• startup — 新 session</a:t>
-            </a:r>
-          </a:p>
-          <a:p>
-            <a:pPr algn="l"/>
-            <a:r>
-              <a:rPr sz="1100">
-                <a:solidFill>
-                  <a:srgbClr val="2C2C2C"/>
-                </a:solidFill>
-                <a:latin typeface="Calibri"/>
-              </a:rPr>
-              <a:t>• resume — /resume 或 --continue</a:t>
-            </a:r>
-          </a:p>
-          <a:p>
-            <a:pPr algn="l"/>
-            <a:r>
-              <a:rPr sz="1100">
-                <a:solidFill>
-                  <a:srgbClr val="2C2C2C"/>
-                </a:solidFill>
-                <a:latin typeface="Calibri"/>
-              </a:rPr>
-              <a:t>• clear — /clear</a:t>
-            </a:r>
-          </a:p>
-          <a:p>
-            <a:pPr algn="l"/>
-            <a:r>
-              <a:rPr sz="1100">
-                <a:solidFill>
-                  <a:srgbClr val="2C2C2C"/>
-                </a:solidFill>
-                <a:latin typeface="Calibri"/>
-              </a:rPr>
-              <a:t>• compact — auto/manual compaction</a:t>
-            </a:r>
-          </a:p>
-          <a:p>
-            <a:pPr algn="l"/>
-            <a:r>
-              <a:rPr sz="1100">
-                <a:solidFill>
-                  <a:srgbClr val="2C2C2C"/>
-                </a:solidFill>
-                <a:latin typeface="Calibri"/>
-              </a:rPr>
               <a:t>• fork — 從現有 session 分叉</a:t>
             </a:r>
           </a:p>
@@ -16607,7 +16607,7 @@
         </p:nvSpPr>
         <p:spPr>
           <a:xfrm>
-            <a:off x="457200" y="4023360"/>
+            <a:off x="457200" y="3886200"/>
             <a:ext cx="11277295" cy="365760"/>
           </a:xfrm>
           <a:prstGeom prst="rect">
@@ -16642,8 +16642,8 @@
         </p:nvSpPr>
         <p:spPr>
           <a:xfrm>
-            <a:off x="457200" y="4480560"/>
-            <a:ext cx="11277295" cy="1371600"/>
+            <a:off x="457200" y="4297680"/>
+            <a:ext cx="11277295" cy="1554480"/>
           </a:xfrm>
           <a:prstGeom prst="rect">
             <a:avLst/>
@@ -16685,8 +16685,8 @@
         </p:nvSpPr>
         <p:spPr>
           <a:xfrm>
-            <a:off x="457200" y="4480560"/>
-            <a:ext cx="11277295" cy="1371600"/>
+            <a:off x="457200" y="4297680"/>
+            <a:ext cx="11277295" cy="1554480"/>
           </a:xfrm>
           <a:prstGeom prst="rect">
             <a:avLst/>
@@ -16701,7 +16701,7 @@
           <a:p>
             <a:pPr algn="l"/>
             <a:r>
-              <a:rPr sz="1000">
+              <a:rPr sz="900">
                 <a:solidFill>
                   <a:srgbClr val="E6E6E6"/>
                 </a:solidFill>
@@ -16713,7 +16713,7 @@
           <a:p>
             <a:pPr algn="l"/>
             <a:r>
-              <a:rPr sz="1000">
+              <a:rPr sz="900">
                 <a:solidFill>
                   <a:srgbClr val="E6E6E6"/>
                 </a:solidFill>
@@ -16725,7 +16725,7 @@
           <a:p>
             <a:pPr algn="l"/>
             <a:r>
-              <a:rPr sz="1000">
+              <a:rPr sz="900">
                 <a:solidFill>
                   <a:srgbClr val="E6E6E6"/>
                 </a:solidFill>
@@ -16737,7 +16737,7 @@
           <a:p>
             <a:pPr algn="l"/>
             <a:r>
-              <a:rPr sz="1000">
+              <a:rPr sz="900">
                 <a:solidFill>
                   <a:srgbClr val="E6E6E6"/>
                 </a:solidFill>
@@ -16749,7 +16749,7 @@
           <a:p>
             <a:pPr algn="l"/>
             <a:r>
-              <a:rPr sz="1000">
+              <a:rPr sz="900">
                 <a:solidFill>
                   <a:srgbClr val="E6E6E6"/>
                 </a:solidFill>
@@ -16761,7 +16761,7 @@
           <a:p>
             <a:pPr algn="l"/>
             <a:r>
-              <a:rPr sz="1000">
+              <a:rPr sz="900">
                 <a:solidFill>
                   <a:srgbClr val="E6E6E6"/>
                 </a:solidFill>
@@ -16780,7 +16780,7 @@
         </p:nvSpPr>
         <p:spPr>
           <a:xfrm>
-            <a:off x="457200" y="6035040"/>
+            <a:off x="457200" y="5943600"/>
             <a:ext cx="11277295" cy="365760"/>
           </a:xfrm>
           <a:prstGeom prst="rect">
@@ -17059,8 +17059,8 @@
         </p:nvSpPr>
         <p:spPr>
           <a:xfrm>
-            <a:off x="457200" y="1554480"/>
-            <a:ext cx="6400800" cy="1828800"/>
+            <a:off x="457200" y="1280160"/>
+            <a:ext cx="6400800" cy="2286000"/>
           </a:xfrm>
           <a:prstGeom prst="rect">
             <a:avLst/>
@@ -17102,8 +17102,8 @@
         </p:nvSpPr>
         <p:spPr>
           <a:xfrm>
-            <a:off x="457200" y="1554480"/>
-            <a:ext cx="6400800" cy="1828800"/>
+            <a:off x="457200" y="1280160"/>
+            <a:ext cx="6400800" cy="2286000"/>
           </a:xfrm>
           <a:prstGeom prst="rect">
             <a:avLst/>
@@ -17118,7 +17118,7 @@
           <a:p>
             <a:pPr algn="l"/>
             <a:r>
-              <a:rPr sz="1100">
+              <a:rPr sz="900">
                 <a:solidFill>
                   <a:srgbClr val="E6E6E6"/>
                 </a:solidFill>
@@ -17130,7 +17130,7 @@
           <a:p>
             <a:pPr algn="l"/>
             <a:r>
-              <a:rPr sz="1100">
+              <a:rPr sz="900">
                 <a:solidFill>
                   <a:srgbClr val="E6E6E6"/>
                 </a:solidFill>
@@ -17142,7 +17142,7 @@
           <a:p>
             <a:pPr algn="l"/>
             <a:r>
-              <a:rPr sz="1100">
+              <a:rPr sz="900">
                 <a:solidFill>
                   <a:srgbClr val="E6E6E6"/>
                 </a:solidFill>
@@ -17154,7 +17154,7 @@
           <a:p>
             <a:pPr algn="l"/>
             <a:r>
-              <a:rPr sz="1100">
+              <a:rPr sz="900">
                 <a:solidFill>
                   <a:srgbClr val="E6E6E6"/>
                 </a:solidFill>
@@ -17166,7 +17166,7 @@
           <a:p>
             <a:pPr algn="l"/>
             <a:r>
-              <a:rPr sz="1100">
+              <a:rPr sz="900">
                 <a:solidFill>
                   <a:srgbClr val="E6E6E6"/>
                 </a:solidFill>
@@ -17178,7 +17178,7 @@
           <a:p>
             <a:pPr algn="l"/>
             <a:r>
-              <a:rPr sz="1100">
+              <a:rPr sz="900">
                 <a:solidFill>
                   <a:srgbClr val="E6E6E6"/>
                 </a:solidFill>
@@ -17190,7 +17190,7 @@
           <a:p>
             <a:pPr algn="l"/>
             <a:r>
-              <a:rPr sz="1100">
+              <a:rPr sz="900">
                 <a:solidFill>
                   <a:srgbClr val="E6E6E6"/>
                 </a:solidFill>
@@ -17202,7 +17202,7 @@
           <a:p>
             <a:pPr algn="l"/>
             <a:r>
-              <a:rPr sz="1100">
+              <a:rPr sz="900">
                 <a:solidFill>
                   <a:srgbClr val="E6E6E6"/>
                 </a:solidFill>
@@ -17214,7 +17214,7 @@
           <a:p>
             <a:pPr algn="l"/>
             <a:r>
-              <a:rPr sz="1100">
+              <a:rPr sz="900">
                 <a:solidFill>
                   <a:srgbClr val="E6E6E6"/>
                 </a:solidFill>
@@ -17226,7 +17226,7 @@
           <a:p>
             <a:pPr algn="l"/>
             <a:r>
-              <a:rPr sz="1100">
+              <a:rPr sz="900">
                 <a:solidFill>
                   <a:srgbClr val="E6E6E6"/>
                 </a:solidFill>
@@ -17238,7 +17238,7 @@
           <a:p>
             <a:pPr algn="l"/>
             <a:r>
-              <a:rPr sz="1100">
+              <a:rPr sz="900">
                 <a:solidFill>
                   <a:srgbClr val="E6E6E6"/>
                 </a:solidFill>
@@ -17250,7 +17250,7 @@
           <a:p>
             <a:pPr algn="l"/>
             <a:r>
-              <a:rPr sz="1100">
+              <a:rPr sz="900">
                 <a:solidFill>
                   <a:srgbClr val="E6E6E6"/>
                 </a:solidFill>
@@ -17262,7 +17262,7 @@
           <a:p>
             <a:pPr algn="l"/>
             <a:r>
-              <a:rPr sz="1100">
+              <a:rPr sz="900">
                 <a:solidFill>
                   <a:srgbClr val="E6E6E6"/>
                 </a:solidFill>
@@ -17274,7 +17274,7 @@
           <a:p>
             <a:pPr algn="l"/>
             <a:r>
-              <a:rPr sz="1100">
+              <a:rPr sz="900">
                 <a:solidFill>
                   <a:srgbClr val="E6E6E6"/>
                 </a:solidFill>
@@ -17286,7 +17286,7 @@
           <a:p>
             <a:pPr algn="l"/>
             <a:r>
-              <a:rPr sz="1100">
+              <a:rPr sz="900">
                 <a:solidFill>
                   <a:srgbClr val="E6E6E6"/>
                 </a:solidFill>
@@ -17305,7 +17305,7 @@
         </p:nvSpPr>
         <p:spPr>
           <a:xfrm>
-            <a:off x="7162495" y="1554480"/>
+            <a:off x="7162495" y="1280160"/>
             <a:ext cx="4572000" cy="365760"/>
           </a:xfrm>
           <a:prstGeom prst="rect">
@@ -17340,8 +17340,8 @@
         </p:nvSpPr>
         <p:spPr>
           <a:xfrm>
-            <a:off x="7162495" y="1920240"/>
-            <a:ext cx="4572000" cy="1371600"/>
+            <a:off x="7162495" y="1645920"/>
+            <a:ext cx="4572000" cy="1463040"/>
           </a:xfrm>
           <a:prstGeom prst="rect">
             <a:avLst/>
@@ -18040,8 +18040,8 @@
         </p:nvSpPr>
         <p:spPr>
           <a:xfrm>
-            <a:off x="457200" y="1554480"/>
-            <a:ext cx="11277295" cy="1828800"/>
+            <a:off x="457200" y="1280160"/>
+            <a:ext cx="11277295" cy="2468880"/>
           </a:xfrm>
           <a:prstGeom prst="rect">
             <a:avLst/>
@@ -18083,8 +18083,8 @@
         </p:nvSpPr>
         <p:spPr>
           <a:xfrm>
-            <a:off x="457200" y="1554480"/>
-            <a:ext cx="11277295" cy="1828800"/>
+            <a:off x="457200" y="1280160"/>
+            <a:ext cx="11277295" cy="2468880"/>
           </a:xfrm>
           <a:prstGeom prst="rect">
             <a:avLst/>
@@ -18099,7 +18099,7 @@
           <a:p>
             <a:pPr algn="l"/>
             <a:r>
-              <a:rPr sz="1100">
+              <a:rPr sz="900">
                 <a:solidFill>
                   <a:srgbClr val="E6E6E6"/>
                 </a:solidFill>
@@ -18111,7 +18111,7 @@
           <a:p>
             <a:pPr algn="l"/>
             <a:r>
-              <a:rPr sz="1100">
+              <a:rPr sz="900">
                 <a:solidFill>
                   <a:srgbClr val="E6E6E6"/>
                 </a:solidFill>
@@ -18123,7 +18123,7 @@
           <a:p>
             <a:pPr algn="l"/>
             <a:r>
-              <a:rPr sz="1100">
+              <a:rPr sz="900">
                 <a:solidFill>
                   <a:srgbClr val="E6E6E6"/>
                 </a:solidFill>
@@ -18135,7 +18135,7 @@
           <a:p>
             <a:pPr algn="l"/>
             <a:r>
-              <a:rPr sz="1100">
+              <a:rPr sz="900">
                 <a:solidFill>
                   <a:srgbClr val="E6E6E6"/>
                 </a:solidFill>
@@ -18147,7 +18147,7 @@
           <a:p>
             <a:pPr algn="l"/>
             <a:r>
-              <a:rPr sz="1100">
+              <a:rPr sz="900">
                 <a:solidFill>
                   <a:srgbClr val="E6E6E6"/>
                 </a:solidFill>
@@ -18159,7 +18159,7 @@
           <a:p>
             <a:pPr algn="l"/>
             <a:r>
-              <a:rPr sz="1100">
+              <a:rPr sz="900">
                 <a:solidFill>
                   <a:srgbClr val="E6E6E6"/>
                 </a:solidFill>
@@ -18171,7 +18171,7 @@
           <a:p>
             <a:pPr algn="l"/>
             <a:r>
-              <a:rPr sz="1100">
+              <a:rPr sz="900">
                 <a:solidFill>
                   <a:srgbClr val="E6E6E6"/>
                 </a:solidFill>
@@ -18183,7 +18183,7 @@
           <a:p>
             <a:pPr algn="l"/>
             <a:r>
-              <a:rPr sz="1100">
+              <a:rPr sz="900">
                 <a:solidFill>
                   <a:srgbClr val="E6E6E6"/>
                 </a:solidFill>
@@ -18195,7 +18195,7 @@
           <a:p>
             <a:pPr algn="l"/>
             <a:r>
-              <a:rPr sz="1100">
+              <a:rPr sz="900">
                 <a:solidFill>
                   <a:srgbClr val="E6E6E6"/>
                 </a:solidFill>
@@ -18207,7 +18207,7 @@
           <a:p>
             <a:pPr algn="l"/>
             <a:r>
-              <a:rPr sz="1100">
+              <a:rPr sz="900">
                 <a:solidFill>
                   <a:srgbClr val="E6E6E6"/>
                 </a:solidFill>
@@ -18219,7 +18219,7 @@
           <a:p>
             <a:pPr algn="l"/>
             <a:r>
-              <a:rPr sz="1100">
+              <a:rPr sz="900">
                 <a:solidFill>
                   <a:srgbClr val="E6E6E6"/>
                 </a:solidFill>
@@ -18231,7 +18231,7 @@
           <a:p>
             <a:pPr algn="l"/>
             <a:r>
-              <a:rPr sz="1100">
+              <a:rPr sz="900">
                 <a:solidFill>
                   <a:srgbClr val="E6E6E6"/>
                 </a:solidFill>
@@ -18243,7 +18243,7 @@
           <a:p>
             <a:pPr algn="l"/>
             <a:r>
-              <a:rPr sz="1100">
+              <a:rPr sz="900">
                 <a:solidFill>
                   <a:srgbClr val="E6E6E6"/>
                 </a:solidFill>
@@ -18255,7 +18255,7 @@
           <a:p>
             <a:pPr algn="l"/>
             <a:r>
-              <a:rPr sz="1100">
+              <a:rPr sz="900">
                 <a:solidFill>
                   <a:srgbClr val="E6E6E6"/>
                 </a:solidFill>
@@ -18267,7 +18267,7 @@
           <a:p>
             <a:pPr algn="l"/>
             <a:r>
-              <a:rPr sz="1100">
+              <a:rPr sz="900">
                 <a:solidFill>
                   <a:srgbClr val="E6E6E6"/>
                 </a:solidFill>
@@ -18279,7 +18279,7 @@
           <a:p>
             <a:pPr algn="l"/>
             <a:r>
-              <a:rPr sz="1100">
+              <a:rPr sz="900">
                 <a:solidFill>
                   <a:srgbClr val="E6E6E6"/>
                 </a:solidFill>
@@ -18291,7 +18291,7 @@
           <a:p>
             <a:pPr algn="l"/>
             <a:r>
-              <a:rPr sz="1100">
+              <a:rPr sz="900">
                 <a:solidFill>
                   <a:srgbClr val="E6E6E6"/>
                 </a:solidFill>
@@ -18310,8 +18310,8 @@
         </p:nvSpPr>
         <p:spPr>
           <a:xfrm>
-            <a:off x="457200" y="3657600"/>
-            <a:ext cx="5577840" cy="2286000"/>
+            <a:off x="457200" y="3840480"/>
+            <a:ext cx="5577840" cy="2011680"/>
           </a:xfrm>
           <a:prstGeom prst="roundRect">
             <a:avLst/>
@@ -18355,7 +18355,7 @@
         </p:nvSpPr>
         <p:spPr>
           <a:xfrm>
-            <a:off x="457200" y="3657600"/>
+            <a:off x="457200" y="3840480"/>
             <a:ext cx="5577840" cy="457200"/>
           </a:xfrm>
           <a:prstGeom prst="rect">
@@ -18398,7 +18398,7 @@
         </p:nvSpPr>
         <p:spPr>
           <a:xfrm>
-            <a:off x="457200" y="3657600"/>
+            <a:off x="457200" y="3840480"/>
             <a:ext cx="5577840" cy="457200"/>
           </a:xfrm>
           <a:prstGeom prst="rect">
@@ -18433,8 +18433,8 @@
         </p:nvSpPr>
         <p:spPr>
           <a:xfrm>
-            <a:off x="640080" y="4297680"/>
-            <a:ext cx="5212080" cy="1554480"/>
+            <a:off x="640080" y="4480560"/>
+            <a:ext cx="5212080" cy="1280160"/>
           </a:xfrm>
           <a:prstGeom prst="rect">
             <a:avLst/>
@@ -18516,8 +18516,8 @@
         </p:nvSpPr>
         <p:spPr>
           <a:xfrm>
-            <a:off x="6156655" y="3657600"/>
-            <a:ext cx="5577840" cy="2286000"/>
+            <a:off x="6156655" y="3840480"/>
+            <a:ext cx="5577840" cy="2011680"/>
           </a:xfrm>
           <a:prstGeom prst="roundRect">
             <a:avLst/>
@@ -18561,7 +18561,7 @@
         </p:nvSpPr>
         <p:spPr>
           <a:xfrm>
-            <a:off x="6156655" y="3657600"/>
+            <a:off x="6156655" y="3840480"/>
             <a:ext cx="5577840" cy="457200"/>
           </a:xfrm>
           <a:prstGeom prst="rect">
@@ -18604,7 +18604,7 @@
         </p:nvSpPr>
         <p:spPr>
           <a:xfrm>
-            <a:off x="6156655" y="3657600"/>
+            <a:off x="6156655" y="3840480"/>
             <a:ext cx="5577840" cy="457200"/>
           </a:xfrm>
           <a:prstGeom prst="rect">
@@ -18639,8 +18639,8 @@
         </p:nvSpPr>
         <p:spPr>
           <a:xfrm>
-            <a:off x="6339535" y="4297680"/>
-            <a:ext cx="5212080" cy="1554480"/>
+            <a:off x="6339535" y="4480560"/>
+            <a:ext cx="5212080" cy="1280160"/>
           </a:xfrm>
           <a:prstGeom prst="rect">
             <a:avLst/>
@@ -18722,7 +18722,7 @@
         </p:nvSpPr>
         <p:spPr>
           <a:xfrm>
-            <a:off x="457200" y="6035040"/>
+            <a:off x="457200" y="5943600"/>
             <a:ext cx="11277295" cy="365760"/>
           </a:xfrm>
           <a:prstGeom prst="roundRect">
@@ -22192,8 +22192,8 @@
         </p:nvSpPr>
         <p:spPr>
           <a:xfrm>
-            <a:off x="457200" y="1554480"/>
-            <a:ext cx="6400800" cy="1828800"/>
+            <a:off x="457200" y="1371600"/>
+            <a:ext cx="6400800" cy="2286000"/>
           </a:xfrm>
           <a:prstGeom prst="rect">
             <a:avLst/>
@@ -22235,8 +22235,8 @@
         </p:nvSpPr>
         <p:spPr>
           <a:xfrm>
-            <a:off x="457200" y="1554480"/>
-            <a:ext cx="6400800" cy="1828800"/>
+            <a:off x="457200" y="1371600"/>
+            <a:ext cx="6400800" cy="2286000"/>
           </a:xfrm>
           <a:prstGeom prst="rect">
             <a:avLst/>
@@ -22251,7 +22251,7 @@
           <a:p>
             <a:pPr algn="l"/>
             <a:r>
-              <a:rPr sz="1100">
+              <a:rPr sz="900">
                 <a:solidFill>
                   <a:srgbClr val="E6E6E6"/>
                 </a:solidFill>
@@ -22263,7 +22263,7 @@
           <a:p>
             <a:pPr algn="l"/>
             <a:r>
-              <a:rPr sz="1100">
+              <a:rPr sz="900">
                 <a:solidFill>
                   <a:srgbClr val="E6E6E6"/>
                 </a:solidFill>
@@ -22275,7 +22275,7 @@
           <a:p>
             <a:pPr algn="l"/>
             <a:r>
-              <a:rPr sz="1100">
+              <a:rPr sz="900">
                 <a:solidFill>
                   <a:srgbClr val="E6E6E6"/>
                 </a:solidFill>
@@ -22287,7 +22287,7 @@
           <a:p>
             <a:pPr algn="l"/>
             <a:r>
-              <a:rPr sz="1100">
+              <a:rPr sz="900">
                 <a:solidFill>
                   <a:srgbClr val="E6E6E6"/>
                 </a:solidFill>
@@ -22299,7 +22299,7 @@
           <a:p>
             <a:pPr algn="l"/>
             <a:r>
-              <a:rPr sz="1100">
+              <a:rPr sz="900">
                 <a:solidFill>
                   <a:srgbClr val="E6E6E6"/>
                 </a:solidFill>
@@ -22311,7 +22311,7 @@
           <a:p>
             <a:pPr algn="l"/>
             <a:r>
-              <a:rPr sz="1100">
+              <a:rPr sz="900">
                 <a:solidFill>
                   <a:srgbClr val="E6E6E6"/>
                 </a:solidFill>
@@ -22323,7 +22323,7 @@
           <a:p>
             <a:pPr algn="l"/>
             <a:r>
-              <a:rPr sz="1100">
+              <a:rPr sz="900">
                 <a:solidFill>
                   <a:srgbClr val="E6E6E6"/>
                 </a:solidFill>
@@ -22335,7 +22335,7 @@
           <a:p>
             <a:pPr algn="l"/>
             <a:r>
-              <a:rPr sz="1100">
+              <a:rPr sz="900">
                 <a:solidFill>
                   <a:srgbClr val="E6E6E6"/>
                 </a:solidFill>
@@ -22347,7 +22347,7 @@
           <a:p>
             <a:pPr algn="l"/>
             <a:r>
-              <a:rPr sz="1100">
+              <a:rPr sz="900">
                 <a:solidFill>
                   <a:srgbClr val="E6E6E6"/>
                 </a:solidFill>
@@ -22359,7 +22359,7 @@
           <a:p>
             <a:pPr algn="l"/>
             <a:r>
-              <a:rPr sz="1100">
+              <a:rPr sz="900">
                 <a:solidFill>
                   <a:srgbClr val="E6E6E6"/>
                 </a:solidFill>
@@ -22371,7 +22371,7 @@
           <a:p>
             <a:pPr algn="l"/>
             <a:r>
-              <a:rPr sz="1100">
+              <a:rPr sz="900">
                 <a:solidFill>
                   <a:srgbClr val="E6E6E6"/>
                 </a:solidFill>
@@ -22383,7 +22383,7 @@
           <a:p>
             <a:pPr algn="l"/>
             <a:r>
-              <a:rPr sz="1100">
+              <a:rPr sz="900">
                 <a:solidFill>
                   <a:srgbClr val="E6E6E6"/>
                 </a:solidFill>
@@ -22395,7 +22395,7 @@
           <a:p>
             <a:pPr algn="l"/>
             <a:r>
-              <a:rPr sz="1100">
+              <a:rPr sz="900">
                 <a:solidFill>
                   <a:srgbClr val="E6E6E6"/>
                 </a:solidFill>
@@ -22407,7 +22407,7 @@
           <a:p>
             <a:pPr algn="l"/>
             <a:r>
-              <a:rPr sz="1100">
+              <a:rPr sz="900">
                 <a:solidFill>
                   <a:srgbClr val="E6E6E6"/>
                 </a:solidFill>
@@ -22419,7 +22419,7 @@
           <a:p>
             <a:pPr algn="l"/>
             <a:r>
-              <a:rPr sz="1100">
+              <a:rPr sz="900">
                 <a:solidFill>
                   <a:srgbClr val="E6E6E6"/>
                 </a:solidFill>
@@ -22431,7 +22431,7 @@
           <a:p>
             <a:pPr algn="l"/>
             <a:r>
-              <a:rPr sz="1100">
+              <a:rPr sz="900">
                 <a:solidFill>
                   <a:srgbClr val="E6E6E6"/>
                 </a:solidFill>
@@ -22450,7 +22450,7 @@
         </p:nvSpPr>
         <p:spPr>
           <a:xfrm>
-            <a:off x="7162495" y="1554480"/>
+            <a:off x="7162495" y="1371600"/>
             <a:ext cx="4572000" cy="365760"/>
           </a:xfrm>
           <a:prstGeom prst="rect">
@@ -22485,7 +22485,7 @@
         </p:nvSpPr>
         <p:spPr>
           <a:xfrm>
-            <a:off x="7162495" y="1920240"/>
+            <a:off x="7162495" y="1737360"/>
             <a:ext cx="4572000" cy="1828800"/>
           </a:xfrm>
           <a:prstGeom prst="rect">
@@ -22568,8 +22568,8 @@
         </p:nvSpPr>
         <p:spPr>
           <a:xfrm>
-            <a:off x="457200" y="3657600"/>
-            <a:ext cx="11277295" cy="1371600"/>
+            <a:off x="457200" y="3840480"/>
+            <a:ext cx="11277295" cy="1554480"/>
           </a:xfrm>
           <a:prstGeom prst="rect">
             <a:avLst/>
@@ -22611,8 +22611,8 @@
         </p:nvSpPr>
         <p:spPr>
           <a:xfrm>
-            <a:off x="457200" y="3657600"/>
-            <a:ext cx="11277295" cy="1371600"/>
+            <a:off x="457200" y="3840480"/>
+            <a:ext cx="11277295" cy="1554480"/>
           </a:xfrm>
           <a:prstGeom prst="rect">
             <a:avLst/>
@@ -22627,7 +22627,7 @@
           <a:p>
             <a:pPr algn="l"/>
             <a:r>
-              <a:rPr sz="1100">
+              <a:rPr sz="1000">
                 <a:solidFill>
                   <a:srgbClr val="E6E6E6"/>
                 </a:solidFill>
@@ -22639,7 +22639,7 @@
           <a:p>
             <a:pPr algn="l"/>
             <a:r>
-              <a:rPr sz="1100">
+              <a:rPr sz="1000">
                 <a:solidFill>
                   <a:srgbClr val="E6E6E6"/>
                 </a:solidFill>
@@ -22651,7 +22651,7 @@
           <a:p>
             <a:pPr algn="l"/>
             <a:r>
-              <a:rPr sz="1100">
+              <a:rPr sz="1000">
                 <a:solidFill>
                   <a:srgbClr val="E6E6E6"/>
                 </a:solidFill>
@@ -22663,7 +22663,7 @@
           <a:p>
             <a:pPr algn="l"/>
             <a:r>
-              <a:rPr sz="1100">
+              <a:rPr sz="1000">
                 <a:solidFill>
                   <a:srgbClr val="E6E6E6"/>
                 </a:solidFill>
@@ -22675,7 +22675,7 @@
           <a:p>
             <a:pPr algn="l"/>
             <a:r>
-              <a:rPr sz="1100">
+              <a:rPr sz="1000">
                 <a:solidFill>
                   <a:srgbClr val="E6E6E6"/>
                 </a:solidFill>
@@ -22687,7 +22687,7 @@
           <a:p>
             <a:pPr algn="l"/>
             <a:r>
-              <a:rPr sz="1100">
+              <a:rPr sz="1000">
                 <a:solidFill>
                   <a:srgbClr val="E6E6E6"/>
                 </a:solidFill>
@@ -22706,7 +22706,7 @@
         </p:nvSpPr>
         <p:spPr>
           <a:xfrm>
-            <a:off x="457200" y="5212080"/>
+            <a:off x="457200" y="5577840"/>
             <a:ext cx="11277295" cy="365760"/>
           </a:xfrm>
           <a:prstGeom prst="roundRect">
@@ -23004,8 +23004,8 @@
         </p:nvSpPr>
         <p:spPr>
           <a:xfrm>
-            <a:off x="457200" y="1554480"/>
-            <a:ext cx="3200400" cy="777240"/>
+            <a:off x="457200" y="1371600"/>
+            <a:ext cx="3200400" cy="731520"/>
           </a:xfrm>
           <a:prstGeom prst="rect">
             <a:avLst/>
@@ -23047,8 +23047,8 @@
         </p:nvSpPr>
         <p:spPr>
           <a:xfrm>
-            <a:off x="457200" y="1554480"/>
-            <a:ext cx="3200400" cy="777240"/>
+            <a:off x="457200" y="1371600"/>
+            <a:ext cx="3200400" cy="731520"/>
           </a:xfrm>
           <a:prstGeom prst="rect">
             <a:avLst/>
@@ -23082,8 +23082,8 @@
         </p:nvSpPr>
         <p:spPr>
           <a:xfrm>
-            <a:off x="3657600" y="1554480"/>
-            <a:ext cx="8076895" cy="777240"/>
+            <a:off x="3657600" y="1371600"/>
+            <a:ext cx="8076895" cy="731520"/>
           </a:xfrm>
           <a:prstGeom prst="rect">
             <a:avLst/>
@@ -23125,8 +23125,8 @@
         </p:nvSpPr>
         <p:spPr>
           <a:xfrm>
-            <a:off x="3749039" y="1554480"/>
-            <a:ext cx="7955279" cy="777240"/>
+            <a:off x="3749039" y="1371600"/>
+            <a:ext cx="7955279" cy="731520"/>
           </a:xfrm>
           <a:prstGeom prst="rect">
             <a:avLst/>
@@ -23141,13 +23141,13 @@
           <a:p>
             <a:pPr algn="l"/>
             <a:r>
-              <a:rPr sz="800" b="0" i="0">
+              <a:rPr sz="1000" b="0" i="0">
                 <a:solidFill>
                   <a:srgbClr val="E6E6E6"/>
                 </a:solidFill>
                 <a:latin typeface="Consolas"/>
               </a:rPr>
-              <a:t>{ ·   "hooks": { ·     "PostToolUse": [ ·       { ·         "matcher": "Edit|Write", ·         "hook...</a:t>
+              <a:t>{ ·   "hooks": { ·     "PostToolUse": [ ·       { ·         "matcher": "Edit|Write", ·         "hooks": [ ·           { "type": "c...</a:t>
             </a:r>
           </a:p>
         </p:txBody>
@@ -23160,8 +23160,8 @@
         </p:nvSpPr>
         <p:spPr>
           <a:xfrm>
-            <a:off x="457200" y="2468880"/>
-            <a:ext cx="3200400" cy="777240"/>
+            <a:off x="457200" y="2240280"/>
+            <a:ext cx="3200400" cy="731520"/>
           </a:xfrm>
           <a:prstGeom prst="rect">
             <a:avLst/>
@@ -23203,8 +23203,8 @@
         </p:nvSpPr>
         <p:spPr>
           <a:xfrm>
-            <a:off x="457200" y="2468880"/>
-            <a:ext cx="3200400" cy="777240"/>
+            <a:off x="457200" y="2240280"/>
+            <a:ext cx="3200400" cy="731520"/>
           </a:xfrm>
           <a:prstGeom prst="rect">
             <a:avLst/>
@@ -23238,8 +23238,8 @@
         </p:nvSpPr>
         <p:spPr>
           <a:xfrm>
-            <a:off x="3657600" y="2468880"/>
-            <a:ext cx="8076895" cy="777240"/>
+            <a:off x="3657600" y="2240280"/>
+            <a:ext cx="8076895" cy="731520"/>
           </a:xfrm>
           <a:prstGeom prst="rect">
             <a:avLst/>
@@ -23281,8 +23281,8 @@
         </p:nvSpPr>
         <p:spPr>
           <a:xfrm>
-            <a:off x="3749039" y="2468880"/>
-            <a:ext cx="7955279" cy="777240"/>
+            <a:off x="3749039" y="2240280"/>
+            <a:ext cx="7955279" cy="731520"/>
           </a:xfrm>
           <a:prstGeom prst="rect">
             <a:avLst/>
@@ -23297,13 +23297,13 @@
           <a:p>
             <a:pPr algn="l"/>
             <a:r>
-              <a:rPr sz="800" b="0" i="0">
+              <a:rPr sz="1000" b="0" i="0">
                 <a:solidFill>
                   <a:srgbClr val="E6E6E6"/>
                 </a:solidFill>
                 <a:latin typeface="Consolas"/>
               </a:rPr>
-              <a:t>{ ·   "hooks": { ·     "PreToolUse": [ ·       { ·         "matcher": "Bash", ·         "hooks": [ ·...</a:t>
+              <a:t>{ ·   "hooks": { ·     "PreToolUse": [ ·       { ·         "matcher": "Bash", ·         "hooks": [ ·           { "type": "command"...</a:t>
             </a:r>
           </a:p>
         </p:txBody>
@@ -23316,8 +23316,8 @@
         </p:nvSpPr>
         <p:spPr>
           <a:xfrm>
-            <a:off x="457200" y="3383280"/>
-            <a:ext cx="3200400" cy="777240"/>
+            <a:off x="457200" y="3108960"/>
+            <a:ext cx="3200400" cy="731520"/>
           </a:xfrm>
           <a:prstGeom prst="rect">
             <a:avLst/>
@@ -23359,8 +23359,8 @@
         </p:nvSpPr>
         <p:spPr>
           <a:xfrm>
-            <a:off x="457200" y="3383280"/>
-            <a:ext cx="3200400" cy="777240"/>
+            <a:off x="457200" y="3108960"/>
+            <a:ext cx="3200400" cy="731520"/>
           </a:xfrm>
           <a:prstGeom prst="rect">
             <a:avLst/>
@@ -23394,8 +23394,8 @@
         </p:nvSpPr>
         <p:spPr>
           <a:xfrm>
-            <a:off x="3657600" y="3383280"/>
-            <a:ext cx="8076895" cy="777240"/>
+            <a:off x="3657600" y="3108960"/>
+            <a:ext cx="8076895" cy="731520"/>
           </a:xfrm>
           <a:prstGeom prst="rect">
             <a:avLst/>
@@ -23437,8 +23437,8 @@
         </p:nvSpPr>
         <p:spPr>
           <a:xfrm>
-            <a:off x="3749039" y="3383280"/>
-            <a:ext cx="7955279" cy="777240"/>
+            <a:off x="3749039" y="3108960"/>
+            <a:ext cx="7955279" cy="731520"/>
           </a:xfrm>
           <a:prstGeom prst="rect">
             <a:avLst/>
@@ -23453,13 +23453,13 @@
           <a:p>
             <a:pPr algn="l"/>
             <a:r>
-              <a:rPr sz="800" b="0" i="0">
+              <a:rPr sz="1000" b="0" i="0">
                 <a:solidFill>
                   <a:srgbClr val="E6E6E6"/>
                 </a:solidFill>
                 <a:latin typeface="Consolas"/>
               </a:rPr>
-              <a:t>{ ·   "hooks": { ·     "Notification": [ ·       { ·         "matcher": "", ·         "hooks": [ ·  ...</a:t>
+              <a:t>{ ·   "hooks": { ·     "Notification": [ ·       { ·         "matcher": "", ·         "hooks": [ ·           { "type": "command", ...</a:t>
             </a:r>
           </a:p>
         </p:txBody>
@@ -23472,8 +23472,8 @@
         </p:nvSpPr>
         <p:spPr>
           <a:xfrm>
-            <a:off x="457200" y="4297680"/>
-            <a:ext cx="3200400" cy="777240"/>
+            <a:off x="457200" y="3977640"/>
+            <a:ext cx="3200400" cy="731520"/>
           </a:xfrm>
           <a:prstGeom prst="rect">
             <a:avLst/>
@@ -23515,8 +23515,8 @@
         </p:nvSpPr>
         <p:spPr>
           <a:xfrm>
-            <a:off x="457200" y="4297680"/>
-            <a:ext cx="3200400" cy="777240"/>
+            <a:off x="457200" y="3977640"/>
+            <a:ext cx="3200400" cy="731520"/>
           </a:xfrm>
           <a:prstGeom prst="rect">
             <a:avLst/>
@@ -23550,8 +23550,8 @@
         </p:nvSpPr>
         <p:spPr>
           <a:xfrm>
-            <a:off x="3657600" y="4297680"/>
-            <a:ext cx="8076895" cy="777240"/>
+            <a:off x="3657600" y="3977640"/>
+            <a:ext cx="8076895" cy="731520"/>
           </a:xfrm>
           <a:prstGeom prst="rect">
             <a:avLst/>
@@ -23593,8 +23593,8 @@
         </p:nvSpPr>
         <p:spPr>
           <a:xfrm>
-            <a:off x="3749039" y="4297680"/>
-            <a:ext cx="7955279" cy="777240"/>
+            <a:off x="3749039" y="3977640"/>
+            <a:ext cx="7955279" cy="731520"/>
           </a:xfrm>
           <a:prstGeom prst="rect">
             <a:avLst/>
@@ -23609,13 +23609,13 @@
           <a:p>
             <a:pPr algn="l"/>
             <a:r>
-              <a:rPr sz="800" b="0" i="0">
+              <a:rPr sz="1000" b="0" i="0">
                 <a:solidFill>
                   <a:srgbClr val="E6E6E6"/>
                 </a:solidFill>
                 <a:latin typeface="Consolas"/>
               </a:rPr>
-              <a:t>{ ·   "hooks": { ·     "PreToolUse": [ ·       { ·         "matcher": "Edit|Write", ·         "hooks...</a:t>
+              <a:t>{ ·   "hooks": { ·     "PreToolUse": [ ·       { ·         "matcher": "Edit|Write", ·         "hooks": [ ·           { "type": "co...</a:t>
             </a:r>
           </a:p>
         </p:txBody>
@@ -23628,8 +23628,8 @@
         </p:nvSpPr>
         <p:spPr>
           <a:xfrm>
-            <a:off x="457200" y="5212080"/>
-            <a:ext cx="3200400" cy="777240"/>
+            <a:off x="457200" y="4846320"/>
+            <a:ext cx="3200400" cy="731520"/>
           </a:xfrm>
           <a:prstGeom prst="rect">
             <a:avLst/>
@@ -23671,8 +23671,8 @@
         </p:nvSpPr>
         <p:spPr>
           <a:xfrm>
-            <a:off x="457200" y="5212080"/>
-            <a:ext cx="3200400" cy="777240"/>
+            <a:off x="457200" y="4846320"/>
+            <a:ext cx="3200400" cy="731520"/>
           </a:xfrm>
           <a:prstGeom prst="rect">
             <a:avLst/>
@@ -23706,8 +23706,8 @@
         </p:nvSpPr>
         <p:spPr>
           <a:xfrm>
-            <a:off x="3657600" y="5212080"/>
-            <a:ext cx="8076895" cy="777240"/>
+            <a:off x="3657600" y="4846320"/>
+            <a:ext cx="8076895" cy="731520"/>
           </a:xfrm>
           <a:prstGeom prst="rect">
             <a:avLst/>
@@ -23749,8 +23749,8 @@
         </p:nvSpPr>
         <p:spPr>
           <a:xfrm>
-            <a:off x="3749039" y="5212080"/>
-            <a:ext cx="7955279" cy="777240"/>
+            <a:off x="3749039" y="4846320"/>
+            <a:ext cx="7955279" cy="731520"/>
           </a:xfrm>
           <a:prstGeom prst="rect">
             <a:avLst/>
@@ -23765,13 +23765,13 @@
           <a:p>
             <a:pPr algn="l"/>
             <a:r>
-              <a:rPr sz="800" b="0" i="0">
+              <a:rPr sz="1000" b="0" i="0">
                 <a:solidFill>
                   <a:srgbClr val="E6E6E6"/>
                 </a:solidFill>
                 <a:latin typeface="Consolas"/>
               </a:rPr>
-              <a:t>{ ·   "hooks": { ·     "SessionStart": [ ·       { ·         "matcher": "startup", ·         "hooks"...</a:t>
+              <a:t>{ ·   "hooks": { ·     "SessionStart": [ ·       { ·         "matcher": "startup", ·         "hooks": [ ·           { "type": "com...</a:t>
             </a:r>
           </a:p>
         </p:txBody>
@@ -23784,7 +23784,7 @@
         </p:nvSpPr>
         <p:spPr>
           <a:xfrm>
-            <a:off x="457200" y="6126480"/>
+            <a:off x="457200" y="5760720"/>
             <a:ext cx="11277295" cy="365760"/>
           </a:xfrm>
           <a:prstGeom prst="roundRect">
@@ -26154,8 +26154,8 @@
         </p:nvSpPr>
         <p:spPr>
           <a:xfrm>
-            <a:off x="457200" y="1554480"/>
-            <a:ext cx="11277295" cy="3200400"/>
+            <a:off x="457200" y="1188720"/>
+            <a:ext cx="11277295" cy="3291840"/>
           </a:xfrm>
           <a:prstGeom prst="rect">
             <a:avLst/>
@@ -26197,8 +26197,8 @@
         </p:nvSpPr>
         <p:spPr>
           <a:xfrm>
-            <a:off x="457200" y="1554480"/>
-            <a:ext cx="11277295" cy="3200400"/>
+            <a:off x="457200" y="1188720"/>
+            <a:ext cx="11277295" cy="3291840"/>
           </a:xfrm>
           <a:prstGeom prst="rect">
             <a:avLst/>
@@ -26213,7 +26213,7 @@
           <a:p>
             <a:pPr algn="l"/>
             <a:r>
-              <a:rPr sz="1000">
+              <a:rPr sz="900">
                 <a:solidFill>
                   <a:srgbClr val="E6E6E6"/>
                 </a:solidFill>
@@ -26225,7 +26225,7 @@
           <a:p>
             <a:pPr algn="l"/>
             <a:r>
-              <a:rPr sz="1000">
+              <a:rPr sz="900">
                 <a:solidFill>
                   <a:srgbClr val="E6E6E6"/>
                 </a:solidFill>
@@ -26237,7 +26237,7 @@
           <a:p>
             <a:pPr algn="l"/>
             <a:r>
-              <a:rPr sz="1000">
+              <a:rPr sz="900">
                 <a:solidFill>
                   <a:srgbClr val="E6E6E6"/>
                 </a:solidFill>
@@ -26249,31 +26249,139 @@
           <a:p>
             <a:pPr algn="l"/>
             <a:r>
-              <a:rPr sz="1000">
+              <a:rPr sz="900">
                 <a:solidFill>
                   <a:srgbClr val="E6E6E6"/>
                 </a:solidFill>
                 <a:latin typeface="Consolas"/>
               </a:rPr>
-              <a:t>description: Perform operations with security checks</a:t>
-            </a:r>
-          </a:p>
-          <a:p>
-            <a:pPr algn="l"/>
-            <a:r>
-              <a:rPr sz="1000">
+              <a:t>hooks:</a:t>
+            </a:r>
+          </a:p>
+          <a:p>
+            <a:pPr algn="l"/>
+            <a:r>
+              <a:rPr sz="900">
                 <a:solidFill>
                   <a:srgbClr val="E6E6E6"/>
                 </a:solidFill>
                 <a:latin typeface="Consolas"/>
               </a:rPr>
+              <a:t>  PreToolUse:</a:t>
+            </a:r>
+          </a:p>
+          <a:p>
+            <a:pPr algn="l"/>
+            <a:r>
+              <a:rPr sz="900">
+                <a:solidFill>
+                  <a:srgbClr val="E6E6E6"/>
+                </a:solidFill>
+                <a:latin typeface="Consolas"/>
+              </a:rPr>
+              <a:t>    - matcher: "Bash"</a:t>
+            </a:r>
+          </a:p>
+          <a:p>
+            <a:pPr algn="l"/>
+            <a:r>
+              <a:rPr sz="900">
+                <a:solidFill>
+                  <a:srgbClr val="E6E6E6"/>
+                </a:solidFill>
+                <a:latin typeface="Consolas"/>
+              </a:rPr>
+              <a:t>      hooks:</a:t>
+            </a:r>
+          </a:p>
+          <a:p>
+            <a:pPr algn="l"/>
+            <a:r>
+              <a:rPr sz="900">
+                <a:solidFill>
+                  <a:srgbClr val="E6E6E6"/>
+                </a:solidFill>
+                <a:latin typeface="Consolas"/>
+              </a:rPr>
+              <a:t>        - type: command</a:t>
+            </a:r>
+          </a:p>
+          <a:p>
+            <a:pPr algn="l"/>
+            <a:r>
+              <a:rPr sz="900">
+                <a:solidFill>
+                  <a:srgbClr val="E6E6E6"/>
+                </a:solidFill>
+                <a:latin typeface="Consolas"/>
+              </a:rPr>
+              <a:t>          command: "./scripts/security-check.sh"</a:t>
+            </a:r>
+          </a:p>
+          <a:p>
+            <a:pPr algn="l"/>
+            <a:r>
+              <a:rPr sz="900">
+                <a:solidFill>
+                  <a:srgbClr val="E6E6E6"/>
+                </a:solidFill>
+                <a:latin typeface="Consolas"/>
+              </a:rPr>
+              <a:t> </a:t>
+            </a:r>
+          </a:p>
+          <a:p>
+            <a:pPr algn="l"/>
+            <a:r>
+              <a:rPr sz="900">
+                <a:solidFill>
+                  <a:srgbClr val="E6E6E6"/>
+                </a:solidFill>
+                <a:latin typeface="Consolas"/>
+              </a:rPr>
+              <a:t># Subagent 中的 hook</a:t>
+            </a:r>
+          </a:p>
+          <a:p>
+            <a:pPr algn="l"/>
+            <a:r>
+              <a:rPr sz="900">
+                <a:solidFill>
+                  <a:srgbClr val="E6E6E6"/>
+                </a:solidFill>
+                <a:latin typeface="Consolas"/>
+              </a:rPr>
+              <a:t>---</a:t>
+            </a:r>
+          </a:p>
+          <a:p>
+            <a:pPr algn="l"/>
+            <a:r>
+              <a:rPr sz="900">
+                <a:solidFill>
+                  <a:srgbClr val="E6E6E6"/>
+                </a:solidFill>
+                <a:latin typeface="Consolas"/>
+              </a:rPr>
+              <a:t>name: code-reviewer</a:t>
+            </a:r>
+          </a:p>
+          <a:p>
+            <a:pPr algn="l"/>
+            <a:r>
+              <a:rPr sz="900">
+                <a:solidFill>
+                  <a:srgbClr val="E6E6E6"/>
+                </a:solidFill>
+                <a:latin typeface="Consolas"/>
+              </a:rPr>
               <a:t>hooks:</a:t>
             </a:r>
           </a:p>
           <a:p>
             <a:pPr algn="l"/>
             <a:r>
-              <a:rPr sz="1000">
+              <a:rPr sz="900">
                 <a:solidFill>
                   <a:srgbClr val="E6E6E6"/>
                 </a:solidFill>
@@ -26285,7 +26393,7 @@
           <a:p>
             <a:pPr algn="l"/>
             <a:r>
-              <a:rPr sz="1000">
+              <a:rPr sz="900">
                 <a:solidFill>
                   <a:srgbClr val="E6E6E6"/>
                 </a:solidFill>
@@ -26297,55 +26405,55 @@
           <a:p>
             <a:pPr algn="l"/>
             <a:r>
-              <a:rPr sz="1000">
+              <a:rPr sz="900">
                 <a:solidFill>
                   <a:srgbClr val="E6E6E6"/>
                 </a:solidFill>
                 <a:latin typeface="Consolas"/>
               </a:rPr>
-              <a:t>      hooks:</a:t>
-            </a:r>
-          </a:p>
-          <a:p>
-            <a:pPr algn="l"/>
-            <a:r>
-              <a:rPr sz="1000">
+              <a:t>      hooks: [{ type: command, command: "./scripts/validate-command.sh" }]</a:t>
+            </a:r>
+          </a:p>
+          <a:p>
+            <a:pPr algn="l"/>
+            <a:r>
+              <a:rPr sz="900">
                 <a:solidFill>
                   <a:srgbClr val="E6E6E6"/>
                 </a:solidFill>
                 <a:latin typeface="Consolas"/>
               </a:rPr>
-              <a:t>        - type: command</a:t>
-            </a:r>
-          </a:p>
-          <a:p>
-            <a:pPr algn="l"/>
-            <a:r>
-              <a:rPr sz="1000">
+              <a:t>  PostToolUse:</a:t>
+            </a:r>
+          </a:p>
+          <a:p>
+            <a:pPr algn="l"/>
+            <a:r>
+              <a:rPr sz="900">
                 <a:solidFill>
                   <a:srgbClr val="E6E6E6"/>
                 </a:solidFill>
                 <a:latin typeface="Consolas"/>
               </a:rPr>
-              <a:t>          command: "./scripts/security-check.sh"</a:t>
-            </a:r>
-          </a:p>
-          <a:p>
-            <a:pPr algn="l"/>
-            <a:r>
-              <a:rPr sz="1000">
+              <a:t>    - matcher: "Edit|Write"</a:t>
+            </a:r>
+          </a:p>
+          <a:p>
+            <a:pPr algn="l"/>
+            <a:r>
+              <a:rPr sz="900">
                 <a:solidFill>
                   <a:srgbClr val="E6E6E6"/>
                 </a:solidFill>
                 <a:latin typeface="Consolas"/>
               </a:rPr>
-              <a:t>---</a:t>
-            </a:r>
-          </a:p>
-          <a:p>
-            <a:pPr algn="l"/>
-            <a:r>
-              <a:rPr sz="1000">
+              <a:t>      hooks: [{ type: command, command: "./scripts/run-linter.sh" }]</a:t>
+            </a:r>
+          </a:p>
+          <a:p>
+            <a:pPr algn="l"/>
+            <a:r>
+              <a:rPr sz="900">
                 <a:solidFill>
                   <a:srgbClr val="E6E6E6"/>
                 </a:solidFill>
@@ -26357,217 +26465,13 @@
           <a:p>
             <a:pPr algn="l"/>
             <a:r>
-              <a:rPr sz="1000">
+              <a:rPr sz="900">
                 <a:solidFill>
                   <a:srgbClr val="E6E6E6"/>
                 </a:solidFill>
                 <a:latin typeface="Consolas"/>
               </a:rPr>
-              <a:t># Subagent 中的 hook</a:t>
-            </a:r>
-          </a:p>
-          <a:p>
-            <a:pPr algn="l"/>
-            <a:r>
-              <a:rPr sz="1000">
-                <a:solidFill>
-                  <a:srgbClr val="E6E6E6"/>
-                </a:solidFill>
-                <a:latin typeface="Consolas"/>
-              </a:rPr>
-              <a:t>---</a:t>
-            </a:r>
-          </a:p>
-          <a:p>
-            <a:pPr algn="l"/>
-            <a:r>
-              <a:rPr sz="1000">
-                <a:solidFill>
-                  <a:srgbClr val="E6E6E6"/>
-                </a:solidFill>
-                <a:latin typeface="Consolas"/>
-              </a:rPr>
-              <a:t>name: code-reviewer</a:t>
-            </a:r>
-          </a:p>
-          <a:p>
-            <a:pPr algn="l"/>
-            <a:r>
-              <a:rPr sz="1000">
-                <a:solidFill>
-                  <a:srgbClr val="E6E6E6"/>
-                </a:solidFill>
-                <a:latin typeface="Consolas"/>
-              </a:rPr>
-              <a:t>description: Review code changes with automatic linting</a:t>
-            </a:r>
-          </a:p>
-          <a:p>
-            <a:pPr algn="l"/>
-            <a:r>
-              <a:rPr sz="1000">
-                <a:solidFill>
-                  <a:srgbClr val="E6E6E6"/>
-                </a:solidFill>
-                <a:latin typeface="Consolas"/>
-              </a:rPr>
-              <a:t>hooks:</a:t>
-            </a:r>
-          </a:p>
-          <a:p>
-            <a:pPr algn="l"/>
-            <a:r>
-              <a:rPr sz="1000">
-                <a:solidFill>
-                  <a:srgbClr val="E6E6E6"/>
-                </a:solidFill>
-                <a:latin typeface="Consolas"/>
-              </a:rPr>
-              <a:t>  PreToolUse:</a:t>
-            </a:r>
-          </a:p>
-          <a:p>
-            <a:pPr algn="l"/>
-            <a:r>
-              <a:rPr sz="1000">
-                <a:solidFill>
-                  <a:srgbClr val="E6E6E6"/>
-                </a:solidFill>
-                <a:latin typeface="Consolas"/>
-              </a:rPr>
-              <a:t>    - matcher: "Bash"</a:t>
-            </a:r>
-          </a:p>
-          <a:p>
-            <a:pPr algn="l"/>
-            <a:r>
-              <a:rPr sz="1000">
-                <a:solidFill>
-                  <a:srgbClr val="E6E6E6"/>
-                </a:solidFill>
-                <a:latin typeface="Consolas"/>
-              </a:rPr>
-              <a:t>      hooks:</a:t>
-            </a:r>
-          </a:p>
-          <a:p>
-            <a:pPr algn="l"/>
-            <a:r>
-              <a:rPr sz="1000">
-                <a:solidFill>
-                  <a:srgbClr val="E6E6E6"/>
-                </a:solidFill>
-                <a:latin typeface="Consolas"/>
-              </a:rPr>
-              <a:t>        - type: command</a:t>
-            </a:r>
-          </a:p>
-          <a:p>
-            <a:pPr algn="l"/>
-            <a:r>
-              <a:rPr sz="1000">
-                <a:solidFill>
-                  <a:srgbClr val="E6E6E6"/>
-                </a:solidFill>
-                <a:latin typeface="Consolas"/>
-              </a:rPr>
-              <a:t>          command: "./scripts/validate-command.sh"</a:t>
-            </a:r>
-          </a:p>
-          <a:p>
-            <a:pPr algn="l"/>
-            <a:r>
-              <a:rPr sz="1000">
-                <a:solidFill>
-                  <a:srgbClr val="E6E6E6"/>
-                </a:solidFill>
-                <a:latin typeface="Consolas"/>
-              </a:rPr>
-              <a:t>  PostToolUse:</a:t>
-            </a:r>
-          </a:p>
-          <a:p>
-            <a:pPr algn="l"/>
-            <a:r>
-              <a:rPr sz="1000">
-                <a:solidFill>
-                  <a:srgbClr val="E6E6E6"/>
-                </a:solidFill>
-                <a:latin typeface="Consolas"/>
-              </a:rPr>
-              <a:t>    - matcher: "Edit|Write"</a:t>
-            </a:r>
-          </a:p>
-          <a:p>
-            <a:pPr algn="l"/>
-            <a:r>
-              <a:rPr sz="1000">
-                <a:solidFill>
-                  <a:srgbClr val="E6E6E6"/>
-                </a:solidFill>
-                <a:latin typeface="Consolas"/>
-              </a:rPr>
-              <a:t>      hooks:</a:t>
-            </a:r>
-          </a:p>
-          <a:p>
-            <a:pPr algn="l"/>
-            <a:r>
-              <a:rPr sz="1000">
-                <a:solidFill>
-                  <a:srgbClr val="E6E6E6"/>
-                </a:solidFill>
-                <a:latin typeface="Consolas"/>
-              </a:rPr>
-              <a:t>        - type: command</a:t>
-            </a:r>
-          </a:p>
-          <a:p>
-            <a:pPr algn="l"/>
-            <a:r>
-              <a:rPr sz="1000">
-                <a:solidFill>
-                  <a:srgbClr val="E6E6E6"/>
-                </a:solidFill>
-                <a:latin typeface="Consolas"/>
-              </a:rPr>
-              <a:t>          command: "./scripts/run-linter.sh"</a:t>
-            </a:r>
-          </a:p>
-          <a:p>
-            <a:pPr algn="l"/>
-            <a:r>
-              <a:rPr sz="1000">
-                <a:solidFill>
-                  <a:srgbClr val="E6E6E6"/>
-                </a:solidFill>
-                <a:latin typeface="Consolas"/>
-              </a:rPr>
-              <a:t>---</a:t>
-            </a:r>
-          </a:p>
-          <a:p>
-            <a:pPr algn="l"/>
-            <a:r>
-              <a:rPr sz="1000">
-                <a:solidFill>
-                  <a:srgbClr val="E6E6E6"/>
-                </a:solidFill>
-                <a:latin typeface="Consolas"/>
-              </a:rPr>
-              <a:t> </a:t>
-            </a:r>
-          </a:p>
-          <a:p>
-            <a:pPr algn="l"/>
-            <a:r>
-              <a:rPr sz="1000">
-                <a:solidFill>
-                  <a:srgbClr val="E6E6E6"/>
-                </a:solidFill>
-                <a:latin typeface="Consolas"/>
-              </a:rPr>
-              <a:t>// 當 agent 作為 subagent 觸發，Stop 自動轉為 SubagentStop</a:t>
+              <a:t># 當 subagent 觸發，Stop 自動轉 SubagentStop</a:t>
             </a:r>
           </a:p>
         </p:txBody>
@@ -26580,7 +26484,7 @@
         </p:nvSpPr>
         <p:spPr>
           <a:xfrm>
-            <a:off x="457200" y="4937760"/>
+            <a:off x="457200" y="4617720"/>
             <a:ext cx="11277295" cy="365760"/>
           </a:xfrm>
           <a:prstGeom prst="rect">
@@ -26615,8 +26519,8 @@
         </p:nvSpPr>
         <p:spPr>
           <a:xfrm>
-            <a:off x="457200" y="5303520"/>
-            <a:ext cx="5577840" cy="1097280"/>
+            <a:off x="457200" y="4983480"/>
+            <a:ext cx="5577840" cy="1463040"/>
           </a:xfrm>
           <a:prstGeom prst="roundRect">
             <a:avLst/>
@@ -26660,7 +26564,7 @@
         </p:nvSpPr>
         <p:spPr>
           <a:xfrm>
-            <a:off x="457200" y="5303520"/>
+            <a:off x="457200" y="4983480"/>
             <a:ext cx="5577840" cy="457200"/>
           </a:xfrm>
           <a:prstGeom prst="rect">
@@ -26703,7 +26607,7 @@
         </p:nvSpPr>
         <p:spPr>
           <a:xfrm>
-            <a:off x="457200" y="5303520"/>
+            <a:off x="457200" y="4983480"/>
             <a:ext cx="5577840" cy="457200"/>
           </a:xfrm>
           <a:prstGeom prst="rect">
@@ -26738,8 +26642,8 @@
         </p:nvSpPr>
         <p:spPr>
           <a:xfrm>
-            <a:off x="640080" y="5943600"/>
-            <a:ext cx="5212080" cy="365760"/>
+            <a:off x="640080" y="5623560"/>
+            <a:ext cx="5212080" cy="731520"/>
           </a:xfrm>
           <a:prstGeom prst="rect">
             <a:avLst/>
@@ -26797,8 +26701,8 @@
         </p:nvSpPr>
         <p:spPr>
           <a:xfrm>
-            <a:off x="6156655" y="5303520"/>
-            <a:ext cx="5577840" cy="1097280"/>
+            <a:off x="6156655" y="4983480"/>
+            <a:ext cx="5577840" cy="1463040"/>
           </a:xfrm>
           <a:prstGeom prst="roundRect">
             <a:avLst/>
@@ -26842,7 +26746,7 @@
         </p:nvSpPr>
         <p:spPr>
           <a:xfrm>
-            <a:off x="6156655" y="5303520"/>
+            <a:off x="6156655" y="4983480"/>
             <a:ext cx="5577840" cy="457200"/>
           </a:xfrm>
           <a:prstGeom prst="rect">
@@ -26885,7 +26789,7 @@
         </p:nvSpPr>
         <p:spPr>
           <a:xfrm>
-            <a:off x="6156655" y="5303520"/>
+            <a:off x="6156655" y="4983480"/>
             <a:ext cx="5577840" cy="457200"/>
           </a:xfrm>
           <a:prstGeom prst="rect">
@@ -26920,8 +26824,8 @@
         </p:nvSpPr>
         <p:spPr>
           <a:xfrm>
-            <a:off x="6339535" y="5943600"/>
-            <a:ext cx="5212080" cy="365760"/>
+            <a:off x="6339535" y="5623560"/>
+            <a:ext cx="5212080" cy="731520"/>
           </a:xfrm>
           <a:prstGeom prst="rect">
             <a:avLst/>
@@ -41131,7 +41035,7 @@
         </p:nvSpPr>
         <p:spPr>
           <a:xfrm>
-            <a:off x="457200" y="1554480"/>
+            <a:off x="457200" y="1325880"/>
             <a:ext cx="11277295" cy="365760"/>
           </a:xfrm>
           <a:prstGeom prst="rect">
@@ -41147,7 +41051,7 @@
           <a:p>
             <a:pPr algn="ctr"/>
             <a:r>
-              <a:rPr sz="1600" b="1" i="0">
+              <a:rPr sz="1500" b="1" i="0">
                 <a:solidFill>
                   <a:srgbClr val="DC2626"/>
                 </a:solidFill>
@@ -41166,7 +41070,7 @@
         </p:nvSpPr>
         <p:spPr>
           <a:xfrm>
-            <a:off x="457200" y="2240280"/>
+            <a:off x="457200" y="1874520"/>
             <a:ext cx="457200" cy="457200"/>
           </a:xfrm>
           <a:prstGeom prst="ellipse">
@@ -41209,7 +41113,7 @@
         </p:nvSpPr>
         <p:spPr>
           <a:xfrm>
-            <a:off x="457200" y="2240280"/>
+            <a:off x="457200" y="1874520"/>
             <a:ext cx="457200" cy="457200"/>
           </a:xfrm>
           <a:prstGeom prst="rect">
@@ -41244,8 +41148,8 @@
         </p:nvSpPr>
         <p:spPr>
           <a:xfrm>
-            <a:off x="1097280" y="2103120"/>
-            <a:ext cx="6400800" cy="731520"/>
+            <a:off x="1097280" y="1783080"/>
+            <a:ext cx="6400800" cy="640080"/>
           </a:xfrm>
           <a:prstGeom prst="roundRect">
             <a:avLst/>
@@ -41289,8 +41193,8 @@
         </p:nvSpPr>
         <p:spPr>
           <a:xfrm>
-            <a:off x="1280160" y="2194560"/>
-            <a:ext cx="6035040" cy="365760"/>
+            <a:off x="1280160" y="1828800"/>
+            <a:ext cx="6035040" cy="320040"/>
           </a:xfrm>
           <a:prstGeom prst="rect">
             <a:avLst/>
@@ -41305,7 +41209,7 @@
           <a:p>
             <a:pPr algn="l"/>
             <a:r>
-              <a:rPr sz="1400" b="1" i="0">
+              <a:rPr sz="1300" b="1" i="0">
                 <a:solidFill>
                   <a:srgbClr val="DC2626"/>
                 </a:solidFill>
@@ -41324,7 +41228,7 @@
         </p:nvSpPr>
         <p:spPr>
           <a:xfrm>
-            <a:off x="1280160" y="2514600"/>
+            <a:off x="1280160" y="2130552"/>
             <a:ext cx="6035040" cy="274320"/>
           </a:xfrm>
           <a:prstGeom prst="rect">
@@ -41359,8 +41263,8 @@
         </p:nvSpPr>
         <p:spPr>
           <a:xfrm>
-            <a:off x="548640" y="2743200"/>
-            <a:ext cx="274320" cy="228600"/>
+            <a:off x="548640" y="2331720"/>
+            <a:ext cx="274320" cy="182880"/>
           </a:xfrm>
           <a:prstGeom prst="downArrow">
             <a:avLst/>
@@ -41402,7 +41306,7 @@
         </p:nvSpPr>
         <p:spPr>
           <a:xfrm>
-            <a:off x="457200" y="3154680"/>
+            <a:off x="457200" y="2651760"/>
             <a:ext cx="457200" cy="457200"/>
           </a:xfrm>
           <a:prstGeom prst="ellipse">
@@ -41445,7 +41349,7 @@
         </p:nvSpPr>
         <p:spPr>
           <a:xfrm>
-            <a:off x="457200" y="3154680"/>
+            <a:off x="457200" y="2651760"/>
             <a:ext cx="457200" cy="457200"/>
           </a:xfrm>
           <a:prstGeom prst="rect">
@@ -41480,8 +41384,8 @@
         </p:nvSpPr>
         <p:spPr>
           <a:xfrm>
-            <a:off x="1097280" y="3017520"/>
-            <a:ext cx="6400800" cy="731520"/>
+            <a:off x="1097280" y="2560320"/>
+            <a:ext cx="6400800" cy="640080"/>
           </a:xfrm>
           <a:prstGeom prst="roundRect">
             <a:avLst/>
@@ -41525,8 +41429,8 @@
         </p:nvSpPr>
         <p:spPr>
           <a:xfrm>
-            <a:off x="1280160" y="3108960"/>
-            <a:ext cx="6035040" cy="365760"/>
+            <a:off x="1280160" y="2606040"/>
+            <a:ext cx="6035040" cy="320040"/>
           </a:xfrm>
           <a:prstGeom prst="rect">
             <a:avLst/>
@@ -41541,7 +41445,7 @@
           <a:p>
             <a:pPr algn="l"/>
             <a:r>
-              <a:rPr sz="1400" b="1" i="0">
+              <a:rPr sz="1300" b="1" i="0">
                 <a:solidFill>
                   <a:srgbClr val="3B82F6"/>
                 </a:solidFill>
@@ -41560,7 +41464,7 @@
         </p:nvSpPr>
         <p:spPr>
           <a:xfrm>
-            <a:off x="1280160" y="3429000"/>
+            <a:off x="1280160" y="2907792"/>
             <a:ext cx="6035040" cy="274320"/>
           </a:xfrm>
           <a:prstGeom prst="rect">
@@ -41595,8 +41499,8 @@
         </p:nvSpPr>
         <p:spPr>
           <a:xfrm>
-            <a:off x="548640" y="3657600"/>
-            <a:ext cx="274320" cy="228600"/>
+            <a:off x="548640" y="3108960"/>
+            <a:ext cx="274320" cy="182880"/>
           </a:xfrm>
           <a:prstGeom prst="downArrow">
             <a:avLst/>
@@ -41638,7 +41542,7 @@
         </p:nvSpPr>
         <p:spPr>
           <a:xfrm>
-            <a:off x="457200" y="4069080"/>
+            <a:off x="457200" y="3429000"/>
             <a:ext cx="457200" cy="457200"/>
           </a:xfrm>
           <a:prstGeom prst="ellipse">
@@ -41681,7 +41585,7 @@
         </p:nvSpPr>
         <p:spPr>
           <a:xfrm>
-            <a:off x="457200" y="4069080"/>
+            <a:off x="457200" y="3429000"/>
             <a:ext cx="457200" cy="457200"/>
           </a:xfrm>
           <a:prstGeom prst="rect">
@@ -41716,8 +41620,8 @@
         </p:nvSpPr>
         <p:spPr>
           <a:xfrm>
-            <a:off x="1097280" y="3931920"/>
-            <a:ext cx="6400800" cy="731520"/>
+            <a:off x="1097280" y="3337560"/>
+            <a:ext cx="6400800" cy="640080"/>
           </a:xfrm>
           <a:prstGeom prst="roundRect">
             <a:avLst/>
@@ -41761,8 +41665,8 @@
         </p:nvSpPr>
         <p:spPr>
           <a:xfrm>
-            <a:off x="1280160" y="4023360"/>
-            <a:ext cx="6035040" cy="365760"/>
+            <a:off x="1280160" y="3383280"/>
+            <a:ext cx="6035040" cy="320040"/>
           </a:xfrm>
           <a:prstGeom prst="rect">
             <a:avLst/>
@@ -41777,7 +41681,7 @@
           <a:p>
             <a:pPr algn="l"/>
             <a:r>
-              <a:rPr sz="1400" b="1" i="0">
+              <a:rPr sz="1300" b="1" i="0">
                 <a:solidFill>
                   <a:srgbClr val="16A34A"/>
                 </a:solidFill>
@@ -41796,7 +41700,7 @@
         </p:nvSpPr>
         <p:spPr>
           <a:xfrm>
-            <a:off x="1280160" y="4343400"/>
+            <a:off x="1280160" y="3685032"/>
             <a:ext cx="6035040" cy="274320"/>
           </a:xfrm>
           <a:prstGeom prst="rect">
@@ -41831,8 +41735,8 @@
         </p:nvSpPr>
         <p:spPr>
           <a:xfrm>
-            <a:off x="548640" y="4572000"/>
-            <a:ext cx="274320" cy="228600"/>
+            <a:off x="548640" y="3886200"/>
+            <a:ext cx="274320" cy="182880"/>
           </a:xfrm>
           <a:prstGeom prst="downArrow">
             <a:avLst/>
@@ -41874,7 +41778,7 @@
         </p:nvSpPr>
         <p:spPr>
           <a:xfrm>
-            <a:off x="457200" y="4983480"/>
+            <a:off x="457200" y="4206240"/>
             <a:ext cx="457200" cy="457200"/>
           </a:xfrm>
           <a:prstGeom prst="ellipse">
@@ -41917,7 +41821,7 @@
         </p:nvSpPr>
         <p:spPr>
           <a:xfrm>
-            <a:off x="457200" y="4983480"/>
+            <a:off x="457200" y="4206240"/>
             <a:ext cx="457200" cy="457200"/>
           </a:xfrm>
           <a:prstGeom prst="rect">
@@ -41952,8 +41856,8 @@
         </p:nvSpPr>
         <p:spPr>
           <a:xfrm>
-            <a:off x="1097280" y="4846320"/>
-            <a:ext cx="6400800" cy="731520"/>
+            <a:off x="1097280" y="4114800"/>
+            <a:ext cx="6400800" cy="640080"/>
           </a:xfrm>
           <a:prstGeom prst="roundRect">
             <a:avLst/>
@@ -41997,8 +41901,8 @@
         </p:nvSpPr>
         <p:spPr>
           <a:xfrm>
-            <a:off x="1280160" y="4937760"/>
-            <a:ext cx="6035040" cy="365760"/>
+            <a:off x="1280160" y="4160520"/>
+            <a:ext cx="6035040" cy="320040"/>
           </a:xfrm>
           <a:prstGeom prst="rect">
             <a:avLst/>
@@ -42013,7 +41917,7 @@
           <a:p>
             <a:pPr algn="l"/>
             <a:r>
-              <a:rPr sz="1400" b="1" i="0">
+              <a:rPr sz="1300" b="1" i="0">
                 <a:solidFill>
                   <a:srgbClr val="C75A1A"/>
                 </a:solidFill>
@@ -42032,7 +41936,7 @@
         </p:nvSpPr>
         <p:spPr>
           <a:xfrm>
-            <a:off x="1280160" y="5257800"/>
+            <a:off x="1280160" y="4462272"/>
             <a:ext cx="6035040" cy="274320"/>
           </a:xfrm>
           <a:prstGeom prst="rect">
@@ -42067,8 +41971,8 @@
         </p:nvSpPr>
         <p:spPr>
           <a:xfrm>
-            <a:off x="548640" y="5486400"/>
-            <a:ext cx="274320" cy="228600"/>
+            <a:off x="548640" y="4663440"/>
+            <a:ext cx="274320" cy="182880"/>
           </a:xfrm>
           <a:prstGeom prst="downArrow">
             <a:avLst/>
@@ -42110,7 +42014,7 @@
         </p:nvSpPr>
         <p:spPr>
           <a:xfrm>
-            <a:off x="457200" y="5897880"/>
+            <a:off x="457200" y="4983480"/>
             <a:ext cx="457200" cy="457200"/>
           </a:xfrm>
           <a:prstGeom prst="ellipse">
@@ -42153,7 +42057,7 @@
         </p:nvSpPr>
         <p:spPr>
           <a:xfrm>
-            <a:off x="457200" y="5897880"/>
+            <a:off x="457200" y="4983480"/>
             <a:ext cx="457200" cy="457200"/>
           </a:xfrm>
           <a:prstGeom prst="rect">
@@ -42188,8 +42092,8 @@
         </p:nvSpPr>
         <p:spPr>
           <a:xfrm>
-            <a:off x="1097280" y="5760720"/>
-            <a:ext cx="6400800" cy="731520"/>
+            <a:off x="1097280" y="4892040"/>
+            <a:ext cx="6400800" cy="640080"/>
           </a:xfrm>
           <a:prstGeom prst="roundRect">
             <a:avLst/>
@@ -42233,8 +42137,8 @@
         </p:nvSpPr>
         <p:spPr>
           <a:xfrm>
-            <a:off x="1280160" y="5852160"/>
-            <a:ext cx="6035040" cy="365760"/>
+            <a:off x="1280160" y="4937760"/>
+            <a:ext cx="6035040" cy="320040"/>
           </a:xfrm>
           <a:prstGeom prst="rect">
             <a:avLst/>
@@ -42249,7 +42153,7 @@
           <a:p>
             <a:pPr algn="l"/>
             <a:r>
-              <a:rPr sz="1400" b="1" i="0">
+              <a:rPr sz="1300" b="1" i="0">
                 <a:solidFill>
                   <a:srgbClr val="2C2C2C"/>
                 </a:solidFill>
@@ -42268,7 +42172,7 @@
         </p:nvSpPr>
         <p:spPr>
           <a:xfrm>
-            <a:off x="1280160" y="6172200"/>
+            <a:off x="1280160" y="5239512"/>
             <a:ext cx="6035040" cy="274320"/>
           </a:xfrm>
           <a:prstGeom prst="rect">
@@ -42303,8 +42207,8 @@
         </p:nvSpPr>
         <p:spPr>
           <a:xfrm>
-            <a:off x="7772400" y="2103120"/>
-            <a:ext cx="4114800" cy="1828800"/>
+            <a:off x="7772400" y="1783080"/>
+            <a:ext cx="4114800" cy="1645920"/>
           </a:xfrm>
           <a:prstGeom prst="rect">
             <a:avLst/>
@@ -42346,8 +42250,8 @@
         </p:nvSpPr>
         <p:spPr>
           <a:xfrm>
-            <a:off x="7772400" y="2103120"/>
-            <a:ext cx="4114800" cy="1828800"/>
+            <a:off x="7772400" y="1783080"/>
+            <a:ext cx="4114800" cy="1645920"/>
           </a:xfrm>
           <a:prstGeom prst="rect">
             <a:avLst/>
@@ -42453,7 +42357,7 @@
         </p:nvSpPr>
         <p:spPr>
           <a:xfrm>
-            <a:off x="7772400" y="4023360"/>
+            <a:off x="7772400" y="3520440"/>
             <a:ext cx="4114800" cy="274320"/>
           </a:xfrm>
           <a:prstGeom prst="rect">
@@ -44583,7 +44487,7 @@
         </p:nvSpPr>
         <p:spPr>
           <a:xfrm>
-            <a:off x="457200" y="1554480"/>
+            <a:off x="457200" y="1325880"/>
             <a:ext cx="11277295" cy="365760"/>
           </a:xfrm>
           <a:prstGeom prst="rect">
@@ -44599,7 +44503,7 @@
           <a:p>
             <a:pPr algn="ctr"/>
             <a:r>
-              <a:rPr sz="1800" b="1" i="0">
+              <a:rPr sz="1700" b="1" i="0">
                 <a:solidFill>
                   <a:srgbClr val="C75A1A"/>
                 </a:solidFill>
@@ -44619,8 +44523,8 @@
           <p:nvPr/>
         </p:nvGraphicFramePr>
         <p:xfrm>
-          <a:off x="457200" y="2103120"/>
-          <a:ext cx="11277295" cy="2743200"/>
+          <a:off x="457200" y="1783080"/>
+          <a:ext cx="11277295" cy="2286000"/>
         </p:xfrm>
         <a:graphic>
           <a:graphicData uri="http://schemas.openxmlformats.org/drawingml/2006/table">
@@ -44633,7 +44537,7 @@
                 <a:gridCol w="3759098"/>
                 <a:gridCol w="3759099"/>
               </a:tblGrid>
-              <a:tr h="457200">
+              <a:tr h="381000">
                 <a:tc>
                   <a:txBody>
                     <a:bodyPr lIns="45720" rIns="45720"/>
@@ -44704,7 +44608,7 @@
                   </a:tcPr>
                 </a:tc>
               </a:tr>
-              <a:tr h="457200">
+              <a:tr h="381000">
                 <a:tc>
                   <a:txBody>
                     <a:bodyPr lIns="45720" rIns="45720" tIns="36576" bIns="36576" wrap="square"/>
@@ -44775,7 +44679,7 @@
                   </a:tcPr>
                 </a:tc>
               </a:tr>
-              <a:tr h="457200">
+              <a:tr h="381000">
                 <a:tc>
                   <a:txBody>
                     <a:bodyPr lIns="45720" rIns="45720" tIns="36576" bIns="36576" wrap="square"/>
@@ -44846,7 +44750,7 @@
                   </a:tcPr>
                 </a:tc>
               </a:tr>
-              <a:tr h="457200">
+              <a:tr h="381000">
                 <a:tc>
                   <a:txBody>
                     <a:bodyPr lIns="45720" rIns="45720" tIns="36576" bIns="36576" wrap="square"/>
@@ -44917,7 +44821,7 @@
                   </a:tcPr>
                 </a:tc>
               </a:tr>
-              <a:tr h="457200">
+              <a:tr h="381000">
                 <a:tc>
                   <a:txBody>
                     <a:bodyPr lIns="45720" rIns="45720" tIns="36576" bIns="36576" wrap="square"/>
@@ -44988,7 +44892,7 @@
                   </a:tcPr>
                 </a:tc>
               </a:tr>
-              <a:tr h="457200">
+              <a:tr h="381000">
                 <a:tc>
                   <a:txBody>
                     <a:bodyPr lIns="45720" rIns="45720" tIns="36576" bIns="36576" wrap="square"/>
@@ -45071,8 +44975,8 @@
         </p:nvSpPr>
         <p:spPr>
           <a:xfrm>
-            <a:off x="457200" y="5029200"/>
-            <a:ext cx="5577840" cy="1371600"/>
+            <a:off x="457200" y="4206240"/>
+            <a:ext cx="5577840" cy="2011680"/>
           </a:xfrm>
           <a:prstGeom prst="roundRect">
             <a:avLst/>
@@ -45116,7 +45020,7 @@
         </p:nvSpPr>
         <p:spPr>
           <a:xfrm>
-            <a:off x="457200" y="5029200"/>
+            <a:off x="457200" y="4206240"/>
             <a:ext cx="5577840" cy="457200"/>
           </a:xfrm>
           <a:prstGeom prst="rect">
@@ -45159,7 +45063,7 @@
         </p:nvSpPr>
         <p:spPr>
           <a:xfrm>
-            <a:off x="457200" y="5029200"/>
+            <a:off x="457200" y="4206240"/>
             <a:ext cx="5577840" cy="457200"/>
           </a:xfrm>
           <a:prstGeom prst="rect">
@@ -45194,8 +45098,8 @@
         </p:nvSpPr>
         <p:spPr>
           <a:xfrm>
-            <a:off x="640080" y="5669280"/>
-            <a:ext cx="5212080" cy="640080"/>
+            <a:off x="640080" y="4846320"/>
+            <a:ext cx="5212080" cy="1280160"/>
           </a:xfrm>
           <a:prstGeom prst="rect">
             <a:avLst/>
@@ -45277,8 +45181,8 @@
         </p:nvSpPr>
         <p:spPr>
           <a:xfrm>
-            <a:off x="6156655" y="5029200"/>
-            <a:ext cx="5577840" cy="1371600"/>
+            <a:off x="6156655" y="4206240"/>
+            <a:ext cx="5577840" cy="2011680"/>
           </a:xfrm>
           <a:prstGeom prst="roundRect">
             <a:avLst/>
@@ -45322,7 +45226,7 @@
         </p:nvSpPr>
         <p:spPr>
           <a:xfrm>
-            <a:off x="6156655" y="5029200"/>
+            <a:off x="6156655" y="4206240"/>
             <a:ext cx="5577840" cy="457200"/>
           </a:xfrm>
           <a:prstGeom prst="rect">
@@ -45365,7 +45269,7 @@
         </p:nvSpPr>
         <p:spPr>
           <a:xfrm>
-            <a:off x="6156655" y="5029200"/>
+            <a:off x="6156655" y="4206240"/>
             <a:ext cx="5577840" cy="457200"/>
           </a:xfrm>
           <a:prstGeom prst="rect">
@@ -45400,8 +45304,8 @@
         </p:nvSpPr>
         <p:spPr>
           <a:xfrm>
-            <a:off x="6339535" y="5669280"/>
-            <a:ext cx="5212080" cy="640080"/>
+            <a:off x="6339535" y="4846320"/>
+            <a:ext cx="5212080" cy="1280160"/>
           </a:xfrm>
           <a:prstGeom prst="rect">
             <a:avLst/>
